--- a/PRESENTATION-00-en.pptx
+++ b/PRESENTATION-00-en.pptx
@@ -3114,8 +3114,8 @@
         </p:nvSpPr>
         <p:spPr>
           <a:xfrm>
-            <a:off x="914400" y="1371600"/>
-            <a:ext cx="10360152" cy="4572000"/>
+            <a:off x="548640" y="1280160"/>
+            <a:ext cx="11091672" cy="4572000"/>
           </a:xfrm>
           <a:prstGeom prst="rect">
             <a:avLst/>
@@ -3130,7 +3130,7 @@
           <a:p>
             <a:pPr algn="ctr"/>
             <a:r>
-              <a:rPr sz="4400" b="1">
+              <a:rPr b="1" sz="4400">
                 <a:solidFill>
                   <a:srgbClr val="FFFFFF"/>
                 </a:solidFill>
@@ -3141,7 +3141,7 @@
           <a:p>
             <a:pPr algn="ctr"/>
             <a:r>
-              <a:rPr sz="4400" b="1">
+              <a:rPr b="1" sz="4400">
                 <a:solidFill>
                   <a:srgbClr val="FFFFFF"/>
                 </a:solidFill>
@@ -3156,7 +3156,7 @@
               </a:spcBef>
             </a:pPr>
             <a:r>
-              <a:rPr sz="2400" b="1">
+              <a:rPr b="1" sz="2400">
                 <a:solidFill>
                   <a:srgbClr val="D4D4D4"/>
                 </a:solidFill>
@@ -3186,47 +3186,14 @@
       <p:grpSpPr/>
       <p:sp>
         <p:nvSpPr>
-          <p:cNvPr id="2" name="TextBox 1"/>
-          <p:cNvSpPr txBox="1"/>
-          <p:nvPr/>
-        </p:nvSpPr>
-        <p:spPr>
-          <a:xfrm>
-            <a:off x="365760" y="182880"/>
-            <a:ext cx="11430000" cy="731520"/>
-          </a:xfrm>
-          <a:prstGeom prst="rect">
-            <a:avLst/>
-          </a:prstGeom>
-          <a:noFill/>
-        </p:spPr>
-        <p:txBody>
-          <a:bodyPr wrap="none">
-            <a:spAutoFit/>
-          </a:bodyPr>
-          <a:lstStyle/>
-          <a:p>
-            <a:r>
-              <a:rPr sz="3200" b="1">
-                <a:solidFill>
-                  <a:srgbClr val="0F3460"/>
-                </a:solidFill>
-              </a:rPr>
-              <a:t>Key Takeaways</a:t>
-            </a:r>
-          </a:p>
-        </p:txBody>
-      </p:sp>
-      <p:sp>
-        <p:nvSpPr>
-          <p:cNvPr id="3" name="Rectangle 2"/>
+          <p:cNvPr id="2" name="Rectangle 1"/>
           <p:cNvSpPr/>
           <p:nvPr/>
         </p:nvSpPr>
         <p:spPr>
           <a:xfrm>
-            <a:off x="365760" y="914400"/>
-            <a:ext cx="11430000" cy="36000"/>
+            <a:off x="0" y="0"/>
+            <a:ext cx="12188952" cy="1188720"/>
           </a:xfrm>
           <a:prstGeom prst="rect">
             <a:avLst/>
@@ -3262,14 +3229,14 @@
       </p:sp>
       <p:sp>
         <p:nvSpPr>
-          <p:cNvPr id="4" name="TextBox 3"/>
+          <p:cNvPr id="3" name="TextBox 2"/>
           <p:cNvSpPr txBox="1"/>
           <p:nvPr/>
         </p:nvSpPr>
         <p:spPr>
           <a:xfrm>
-            <a:off x="365760" y="1051560"/>
-            <a:ext cx="11430000" cy="5577840"/>
+            <a:off x="548640" y="182880"/>
+            <a:ext cx="11091672" cy="822960"/>
           </a:xfrm>
           <a:prstGeom prst="rect">
             <a:avLst/>
@@ -3282,9 +3249,52 @@
           </a:bodyPr>
           <a:lstStyle/>
           <a:p>
+            <a:r>
+              <a:rPr b="1" sz="3200">
+                <a:solidFill>
+                  <a:srgbClr val="FFFFFF"/>
+                </a:solidFill>
+              </a:rPr>
+              <a:t>Key Takeaways</a:t>
+            </a:r>
+          </a:p>
+        </p:txBody>
+      </p:sp>
+      <p:sp>
+        <p:nvSpPr>
+          <p:cNvPr id="4" name="TextBox 3"/>
+          <p:cNvSpPr txBox="1"/>
+          <p:nvPr/>
+        </p:nvSpPr>
+        <p:spPr>
+          <a:xfrm>
+            <a:off x="548640" y="1325880"/>
+            <a:ext cx="11091672" cy="2420000"/>
+          </a:xfrm>
+          <a:prstGeom prst="rect">
+            <a:avLst/>
+          </a:prstGeom>
+          <a:noFill/>
+        </p:spPr>
+        <p:txBody>
+          <a:bodyPr wrap="square">
+            <a:spAutoFit/>
+          </a:bodyPr>
+          <a:lstStyle/>
+          <a:p>
             <a:pPr>
               <a:spcBef>
-                <a:spcPts val="200"/>
+                <a:spcPts val="400"/>
+              </a:spcBef>
+            </a:pPr>
+            <a:r>
+              <a:t/>
+            </a:r>
+          </a:p>
+          <a:p>
+            <a:pPr>
+              <a:spcBef>
+                <a:spcPts val="300"/>
               </a:spcBef>
             </a:pPr>
             <a:r>
@@ -3315,7 +3325,7 @@
           <a:p>
             <a:pPr>
               <a:spcBef>
-                <a:spcPts val="200"/>
+                <a:spcPts val="300"/>
               </a:spcBef>
             </a:pPr>
             <a:r>
@@ -3346,7 +3356,7 @@
           <a:p>
             <a:pPr>
               <a:spcBef>
-                <a:spcPts val="200"/>
+                <a:spcPts val="300"/>
               </a:spcBef>
             </a:pPr>
             <a:r>
@@ -3377,7 +3387,7 @@
           <a:p>
             <a:pPr>
               <a:spcBef>
-                <a:spcPts val="200"/>
+                <a:spcPts val="300"/>
               </a:spcBef>
             </a:pPr>
             <a:r>
@@ -3408,7 +3418,7 @@
           <a:p>
             <a:pPr>
               <a:spcBef>
-                <a:spcPts val="200"/>
+                <a:spcPts val="300"/>
               </a:spcBef>
             </a:pPr>
             <a:r>
@@ -3439,7 +3449,7 @@
           <a:p>
             <a:pPr>
               <a:spcBef>
-                <a:spcPts val="200"/>
+                <a:spcPts val="300"/>
               </a:spcBef>
             </a:pPr>
             <a:r>
@@ -3470,7 +3480,7 @@
           <a:p>
             <a:pPr>
               <a:spcBef>
-                <a:spcPts val="800"/>
+                <a:spcPts val="400"/>
               </a:spcBef>
             </a:pPr>
             <a:r>
@@ -3480,28 +3490,256 @@
           <a:p>
             <a:pPr>
               <a:spcBef>
+                <a:spcPts val="1000"/>
+              </a:spcBef>
+            </a:pPr>
+            <a:r>
+              <a:t/>
+            </a:r>
+          </a:p>
+          <a:p>
+            <a:pPr>
+              <a:spcBef>
                 <a:spcPts val="400"/>
               </a:spcBef>
             </a:pPr>
             <a:r>
+              <a:t/>
+            </a:r>
+          </a:p>
+        </p:txBody>
+      </p:sp>
+      <p:sp>
+        <p:nvSpPr>
+          <p:cNvPr id="5" name="Rectangle 4"/>
+          <p:cNvSpPr/>
+          <p:nvPr/>
+        </p:nvSpPr>
+        <p:spPr>
+          <a:xfrm>
+            <a:off x="548640" y="3745880"/>
+            <a:ext cx="73152" cy="502880"/>
+          </a:xfrm>
+          <a:prstGeom prst="rect">
+            <a:avLst/>
+          </a:prstGeom>
+          <a:solidFill>
+            <a:srgbClr val="0F3460"/>
+          </a:solidFill>
+          <a:ln>
+            <a:noFill/>
+          </a:ln>
+        </p:spPr>
+        <p:style>
+          <a:lnRef idx="1">
+            <a:schemeClr val="accent1"/>
+          </a:lnRef>
+          <a:fillRef idx="3">
+            <a:schemeClr val="accent1"/>
+          </a:fillRef>
+          <a:effectRef idx="2">
+            <a:schemeClr val="accent1"/>
+          </a:effectRef>
+          <a:fontRef idx="minor">
+            <a:schemeClr val="lt1"/>
+          </a:fontRef>
+        </p:style>
+        <p:txBody>
+          <a:bodyPr rtlCol="0" anchor="ctr"/>
+          <a:lstStyle/>
+          <a:p>
+            <a:pPr algn="ctr"/>
+          </a:p>
+        </p:txBody>
+      </p:sp>
+      <p:sp>
+        <p:nvSpPr>
+          <p:cNvPr id="6" name="Rectangle 5"/>
+          <p:cNvSpPr/>
+          <p:nvPr/>
+        </p:nvSpPr>
+        <p:spPr>
+          <a:xfrm>
+            <a:off x="621792" y="3745880"/>
+            <a:ext cx="11018520" cy="502880"/>
+          </a:xfrm>
+          <a:prstGeom prst="rect">
+            <a:avLst/>
+          </a:prstGeom>
+          <a:solidFill>
+            <a:srgbClr val="E8F0FE"/>
+          </a:solidFill>
+          <a:ln>
+            <a:noFill/>
+          </a:ln>
+        </p:spPr>
+        <p:style>
+          <a:lnRef idx="1">
+            <a:schemeClr val="accent1"/>
+          </a:lnRef>
+          <a:fillRef idx="3">
+            <a:schemeClr val="accent1"/>
+          </a:fillRef>
+          <a:effectRef idx="2">
+            <a:schemeClr val="accent1"/>
+          </a:effectRef>
+          <a:fontRef idx="minor">
+            <a:schemeClr val="lt1"/>
+          </a:fontRef>
+        </p:style>
+        <p:txBody>
+          <a:bodyPr rtlCol="0" anchor="ctr"/>
+          <a:lstStyle/>
+          <a:p>
+            <a:pPr algn="ctr"/>
+          </a:p>
+        </p:txBody>
+      </p:sp>
+      <p:sp>
+        <p:nvSpPr>
+          <p:cNvPr id="7" name="TextBox 6"/>
+          <p:cNvSpPr txBox="1"/>
+          <p:nvPr/>
+        </p:nvSpPr>
+        <p:spPr>
+          <a:xfrm>
+            <a:off x="777240" y="3837320"/>
+            <a:ext cx="10771632" cy="411440"/>
+          </a:xfrm>
+          <a:prstGeom prst="rect">
+            <a:avLst/>
+          </a:prstGeom>
+          <a:noFill/>
+        </p:spPr>
+        <p:txBody>
+          <a:bodyPr wrap="square">
+            <a:spAutoFit/>
+          </a:bodyPr>
+          <a:lstStyle/>
+          <a:p>
+            <a:r>
               <a:rPr sz="2000" i="1">
                 <a:solidFill>
-                  <a:srgbClr val="555555"/>
+                  <a:srgbClr val="16213E"/>
                 </a:solidFill>
               </a:rPr>
               <a:t>The setup takes ~20 minutes.</a:t>
             </a:r>
           </a:p>
-          <a:p>
-            <a:pPr>
-              <a:spcBef>
-                <a:spcPts val="400"/>
-              </a:spcBef>
-            </a:pPr>
+        </p:txBody>
+      </p:sp>
+      <p:sp>
+        <p:nvSpPr>
+          <p:cNvPr id="8" name="Rectangle 7"/>
+          <p:cNvSpPr/>
+          <p:nvPr/>
+        </p:nvSpPr>
+        <p:spPr>
+          <a:xfrm>
+            <a:off x="548640" y="4340200"/>
+            <a:ext cx="73152" cy="502880"/>
+          </a:xfrm>
+          <a:prstGeom prst="rect">
+            <a:avLst/>
+          </a:prstGeom>
+          <a:solidFill>
+            <a:srgbClr val="0F3460"/>
+          </a:solidFill>
+          <a:ln>
+            <a:noFill/>
+          </a:ln>
+        </p:spPr>
+        <p:style>
+          <a:lnRef idx="1">
+            <a:schemeClr val="accent1"/>
+          </a:lnRef>
+          <a:fillRef idx="3">
+            <a:schemeClr val="accent1"/>
+          </a:fillRef>
+          <a:effectRef idx="2">
+            <a:schemeClr val="accent1"/>
+          </a:effectRef>
+          <a:fontRef idx="minor">
+            <a:schemeClr val="lt1"/>
+          </a:fontRef>
+        </p:style>
+        <p:txBody>
+          <a:bodyPr rtlCol="0" anchor="ctr"/>
+          <a:lstStyle/>
+          <a:p>
+            <a:pPr algn="ctr"/>
+          </a:p>
+        </p:txBody>
+      </p:sp>
+      <p:sp>
+        <p:nvSpPr>
+          <p:cNvPr id="9" name="Rectangle 8"/>
+          <p:cNvSpPr/>
+          <p:nvPr/>
+        </p:nvSpPr>
+        <p:spPr>
+          <a:xfrm>
+            <a:off x="621792" y="4340200"/>
+            <a:ext cx="11018520" cy="502880"/>
+          </a:xfrm>
+          <a:prstGeom prst="rect">
+            <a:avLst/>
+          </a:prstGeom>
+          <a:solidFill>
+            <a:srgbClr val="E8F0FE"/>
+          </a:solidFill>
+          <a:ln>
+            <a:noFill/>
+          </a:ln>
+        </p:spPr>
+        <p:style>
+          <a:lnRef idx="1">
+            <a:schemeClr val="accent1"/>
+          </a:lnRef>
+          <a:fillRef idx="3">
+            <a:schemeClr val="accent1"/>
+          </a:fillRef>
+          <a:effectRef idx="2">
+            <a:schemeClr val="accent1"/>
+          </a:effectRef>
+          <a:fontRef idx="minor">
+            <a:schemeClr val="lt1"/>
+          </a:fontRef>
+        </p:style>
+        <p:txBody>
+          <a:bodyPr rtlCol="0" anchor="ctr"/>
+          <a:lstStyle/>
+          <a:p>
+            <a:pPr algn="ctr"/>
+          </a:p>
+        </p:txBody>
+      </p:sp>
+      <p:sp>
+        <p:nvSpPr>
+          <p:cNvPr id="10" name="TextBox 9"/>
+          <p:cNvSpPr txBox="1"/>
+          <p:nvPr/>
+        </p:nvSpPr>
+        <p:spPr>
+          <a:xfrm>
+            <a:off x="777240" y="4431640"/>
+            <a:ext cx="10771632" cy="411440"/>
+          </a:xfrm>
+          <a:prstGeom prst="rect">
+            <a:avLst/>
+          </a:prstGeom>
+          <a:noFill/>
+        </p:spPr>
+        <p:txBody>
+          <a:bodyPr wrap="square">
+            <a:spAutoFit/>
+          </a:bodyPr>
+          <a:lstStyle/>
+          <a:p>
             <a:r>
               <a:rPr sz="2000" i="1">
                 <a:solidFill>
-                  <a:srgbClr val="555555"/>
+                  <a:srgbClr val="16213E"/>
                 </a:solidFill>
               </a:rPr>
               <a:t>Once done, every branch runs with a single </a:t>
@@ -3509,7 +3747,7 @@
             <a:r>
               <a:rPr sz="2000" i="1">
                 <a:solidFill>
-                  <a:srgbClr val="555555"/>
+                  <a:srgbClr val="16213E"/>
                 </a:solidFill>
                 <a:latin typeface="Courier New"/>
               </a:rPr>
@@ -3518,7 +3756,7 @@
             <a:r>
               <a:rPr sz="2000" i="1">
                 <a:solidFill>
-                  <a:srgbClr val="555555"/>
+                  <a:srgbClr val="16213E"/>
                 </a:solidFill>
               </a:rPr>
               <a:t>.</a:t>
@@ -3560,8 +3798,8 @@
         </p:nvSpPr>
         <p:spPr>
           <a:xfrm>
-            <a:off x="914400" y="1371600"/>
-            <a:ext cx="10360152" cy="4572000"/>
+            <a:off x="548640" y="1280160"/>
+            <a:ext cx="11091672" cy="4572000"/>
           </a:xfrm>
           <a:prstGeom prst="rect">
             <a:avLst/>
@@ -3576,7 +3814,7 @@
           <a:p>
             <a:pPr algn="ctr"/>
             <a:r>
-              <a:rPr sz="4400" b="1">
+              <a:rPr b="1" sz="4400">
                 <a:solidFill>
                   <a:srgbClr val="FFFFFF"/>
                 </a:solidFill>
@@ -3587,7 +3825,7 @@
           <a:p>
             <a:pPr algn="ctr"/>
             <a:r>
-              <a:rPr sz="3600" b="1">
+              <a:rPr b="1" sz="3600">
                 <a:solidFill>
                   <a:srgbClr val="FFFFFF"/>
                 </a:solidFill>
@@ -3602,7 +3840,7 @@
               </a:spcBef>
             </a:pPr>
             <a:r>
-              <a:rPr sz="2400" b="1">
+              <a:rPr b="1" sz="2400">
                 <a:solidFill>
                   <a:srgbClr val="D4D4D4"/>
                 </a:solidFill>
@@ -3617,7 +3855,7 @@
               </a:spcBef>
             </a:pPr>
             <a:r>
-              <a:rPr sz="2400" b="1">
+              <a:rPr b="1" sz="2400">
                 <a:solidFill>
                   <a:srgbClr val="D4D4D4"/>
                 </a:solidFill>
@@ -3628,7 +3866,7 @@
           <a:p>
             <a:pPr algn="ctr"/>
             <a:r>
-              <a:rPr sz="2000" i="1">
+              <a:rPr i="1" sz="2000">
                 <a:solidFill>
                   <a:srgbClr val="D4D4D4"/>
                 </a:solidFill>
@@ -3658,47 +3896,14 @@
       <p:grpSpPr/>
       <p:sp>
         <p:nvSpPr>
-          <p:cNvPr id="2" name="TextBox 1"/>
-          <p:cNvSpPr txBox="1"/>
-          <p:nvPr/>
-        </p:nvSpPr>
-        <p:spPr>
-          <a:xfrm>
-            <a:off x="365760" y="182880"/>
-            <a:ext cx="11430000" cy="731520"/>
-          </a:xfrm>
-          <a:prstGeom prst="rect">
-            <a:avLst/>
-          </a:prstGeom>
-          <a:noFill/>
-        </p:spPr>
-        <p:txBody>
-          <a:bodyPr wrap="none">
-            <a:spAutoFit/>
-          </a:bodyPr>
-          <a:lstStyle/>
-          <a:p>
-            <a:r>
-              <a:rPr sz="3200" b="1">
-                <a:solidFill>
-                  <a:srgbClr val="0F3460"/>
-                </a:solidFill>
-              </a:rPr>
-              <a:t>Agenda</a:t>
-            </a:r>
-          </a:p>
-        </p:txBody>
-      </p:sp>
-      <p:sp>
-        <p:nvSpPr>
-          <p:cNvPr id="3" name="Rectangle 2"/>
+          <p:cNvPr id="2" name="Rectangle 1"/>
           <p:cNvSpPr/>
           <p:nvPr/>
         </p:nvSpPr>
         <p:spPr>
           <a:xfrm>
-            <a:off x="365760" y="914400"/>
-            <a:ext cx="11430000" cy="36000"/>
+            <a:off x="0" y="0"/>
+            <a:ext cx="12188952" cy="1188720"/>
           </a:xfrm>
           <a:prstGeom prst="rect">
             <a:avLst/>
@@ -3734,14 +3939,14 @@
       </p:sp>
       <p:sp>
         <p:nvSpPr>
-          <p:cNvPr id="4" name="TextBox 3"/>
+          <p:cNvPr id="3" name="TextBox 2"/>
           <p:cNvSpPr txBox="1"/>
           <p:nvPr/>
         </p:nvSpPr>
         <p:spPr>
           <a:xfrm>
-            <a:off x="365760" y="1051560"/>
-            <a:ext cx="11430000" cy="5577840"/>
+            <a:off x="548640" y="182880"/>
+            <a:ext cx="11091672" cy="822960"/>
           </a:xfrm>
           <a:prstGeom prst="rect">
             <a:avLst/>
@@ -3754,9 +3959,52 @@
           </a:bodyPr>
           <a:lstStyle/>
           <a:p>
+            <a:r>
+              <a:rPr b="1" sz="3200">
+                <a:solidFill>
+                  <a:srgbClr val="FFFFFF"/>
+                </a:solidFill>
+              </a:rPr>
+              <a:t>Agenda</a:t>
+            </a:r>
+          </a:p>
+        </p:txBody>
+      </p:sp>
+      <p:sp>
+        <p:nvSpPr>
+          <p:cNvPr id="4" name="TextBox 3"/>
+          <p:cNvSpPr txBox="1"/>
+          <p:nvPr/>
+        </p:nvSpPr>
+        <p:spPr>
+          <a:xfrm>
+            <a:off x="548640" y="1325880"/>
+            <a:ext cx="11091672" cy="2660000"/>
+          </a:xfrm>
+          <a:prstGeom prst="rect">
+            <a:avLst/>
+          </a:prstGeom>
+          <a:noFill/>
+        </p:spPr>
+        <p:txBody>
+          <a:bodyPr wrap="square">
+            <a:spAutoFit/>
+          </a:bodyPr>
+          <a:lstStyle/>
+          <a:p>
             <a:pPr>
               <a:spcBef>
-                <a:spcPts val="200"/>
+                <a:spcPts val="400"/>
+              </a:spcBef>
+            </a:pPr>
+            <a:r>
+              <a:t/>
+            </a:r>
+          </a:p>
+          <a:p>
+            <a:pPr>
+              <a:spcBef>
+                <a:spcPts val="300"/>
               </a:spcBef>
             </a:pPr>
             <a:r>
@@ -3771,7 +4019,7 @@
           <a:p>
             <a:pPr>
               <a:spcBef>
-                <a:spcPts val="200"/>
+                <a:spcPts val="300"/>
               </a:spcBef>
             </a:pPr>
             <a:r>
@@ -3786,7 +4034,7 @@
           <a:p>
             <a:pPr>
               <a:spcBef>
-                <a:spcPts val="200"/>
+                <a:spcPts val="300"/>
               </a:spcBef>
             </a:pPr>
             <a:r>
@@ -3801,7 +4049,7 @@
           <a:p>
             <a:pPr>
               <a:spcBef>
-                <a:spcPts val="200"/>
+                <a:spcPts val="300"/>
               </a:spcBef>
             </a:pPr>
             <a:r>
@@ -3816,7 +4064,7 @@
           <a:p>
             <a:pPr>
               <a:spcBef>
-                <a:spcPts val="200"/>
+                <a:spcPts val="300"/>
               </a:spcBef>
             </a:pPr>
             <a:r>
@@ -3831,7 +4079,7 @@
           <a:p>
             <a:pPr>
               <a:spcBef>
-                <a:spcPts val="200"/>
+                <a:spcPts val="300"/>
               </a:spcBef>
             </a:pPr>
             <a:r>
@@ -3846,7 +4094,7 @@
           <a:p>
             <a:pPr>
               <a:spcBef>
-                <a:spcPts val="200"/>
+                <a:spcPts val="300"/>
               </a:spcBef>
             </a:pPr>
             <a:r>
@@ -3861,7 +4109,7 @@
           <a:p>
             <a:pPr>
               <a:spcBef>
-                <a:spcPts val="200"/>
+                <a:spcPts val="300"/>
               </a:spcBef>
             </a:pPr>
             <a:r>
@@ -3895,47 +4143,14 @@
       <p:grpSpPr/>
       <p:sp>
         <p:nvSpPr>
-          <p:cNvPr id="2" name="TextBox 1"/>
-          <p:cNvSpPr txBox="1"/>
-          <p:nvPr/>
-        </p:nvSpPr>
-        <p:spPr>
-          <a:xfrm>
-            <a:off x="365760" y="182880"/>
-            <a:ext cx="11430000" cy="731520"/>
-          </a:xfrm>
-          <a:prstGeom prst="rect">
-            <a:avLst/>
-          </a:prstGeom>
-          <a:noFill/>
-        </p:spPr>
-        <p:txBody>
-          <a:bodyPr wrap="none">
-            <a:spAutoFit/>
-          </a:bodyPr>
-          <a:lstStyle/>
-          <a:p>
-            <a:r>
-              <a:rPr sz="3200" b="1">
-                <a:solidFill>
-                  <a:srgbClr val="0F3460"/>
-                </a:solidFill>
-              </a:rPr>
-              <a:t>Operating System</a:t>
-            </a:r>
-          </a:p>
-        </p:txBody>
-      </p:sp>
-      <p:sp>
-        <p:nvSpPr>
-          <p:cNvPr id="3" name="Rectangle 2"/>
+          <p:cNvPr id="2" name="Rectangle 1"/>
           <p:cNvSpPr/>
           <p:nvPr/>
         </p:nvSpPr>
         <p:spPr>
           <a:xfrm>
-            <a:off x="365760" y="914400"/>
-            <a:ext cx="11430000" cy="36000"/>
+            <a:off x="0" y="0"/>
+            <a:ext cx="12188952" cy="1188720"/>
           </a:xfrm>
           <a:prstGeom prst="rect">
             <a:avLst/>
@@ -3971,14 +4186,14 @@
       </p:sp>
       <p:sp>
         <p:nvSpPr>
-          <p:cNvPr id="4" name="TextBox 3"/>
+          <p:cNvPr id="3" name="TextBox 2"/>
           <p:cNvSpPr txBox="1"/>
           <p:nvPr/>
         </p:nvSpPr>
         <p:spPr>
           <a:xfrm>
-            <a:off x="365760" y="1051560"/>
-            <a:ext cx="11430000" cy="5577840"/>
+            <a:off x="548640" y="182880"/>
+            <a:ext cx="11091672" cy="822960"/>
           </a:xfrm>
           <a:prstGeom prst="rect">
             <a:avLst/>
@@ -3991,8 +4206,51 @@
           </a:bodyPr>
           <a:lstStyle/>
           <a:p>
+            <a:r>
+              <a:rPr b="1" sz="3200">
+                <a:solidFill>
+                  <a:srgbClr val="FFFFFF"/>
+                </a:solidFill>
+              </a:rPr>
+              <a:t>Operating System</a:t>
+            </a:r>
+          </a:p>
+        </p:txBody>
+      </p:sp>
+      <p:sp>
+        <p:nvSpPr>
+          <p:cNvPr id="4" name="TextBox 3"/>
+          <p:cNvSpPr txBox="1"/>
+          <p:nvPr/>
+        </p:nvSpPr>
+        <p:spPr>
+          <a:xfrm>
+            <a:off x="548640" y="1325880"/>
+            <a:ext cx="11091672" cy="2240000"/>
+          </a:xfrm>
+          <a:prstGeom prst="rect">
+            <a:avLst/>
+          </a:prstGeom>
+          <a:noFill/>
+        </p:spPr>
+        <p:txBody>
+          <a:bodyPr wrap="square">
+            <a:spAutoFit/>
+          </a:bodyPr>
+          <a:lstStyle/>
+          <a:p>
             <a:pPr>
               <a:spcBef>
+                <a:spcPts val="400"/>
+              </a:spcBef>
+            </a:pPr>
+            <a:r>
+              <a:t/>
+            </a:r>
+          </a:p>
+          <a:p>
+            <a:pPr>
+              <a:spcBef>
                 <a:spcPts val="800"/>
               </a:spcBef>
             </a:pPr>
@@ -4008,7 +4266,17 @@
           <a:p>
             <a:pPr>
               <a:spcBef>
-                <a:spcPts val="200"/>
+                <a:spcPts val="400"/>
+              </a:spcBef>
+            </a:pPr>
+            <a:r>
+              <a:t/>
+            </a:r>
+          </a:p>
+          <a:p>
+            <a:pPr>
+              <a:spcBef>
+                <a:spcPts val="300"/>
               </a:spcBef>
             </a:pPr>
             <a:r>
@@ -4039,7 +4307,7 @@
           <a:p>
             <a:pPr>
               <a:spcBef>
-                <a:spcPts val="200"/>
+                <a:spcPts val="300"/>
               </a:spcBef>
             </a:pPr>
             <a:r>
@@ -4070,7 +4338,7 @@
           <a:p>
             <a:pPr>
               <a:spcBef>
-                <a:spcPts val="200"/>
+                <a:spcPts val="300"/>
               </a:spcBef>
             </a:pPr>
             <a:r>
@@ -4101,7 +4369,7 @@
           <a:p>
             <a:pPr>
               <a:spcBef>
-                <a:spcPts val="200"/>
+                <a:spcPts val="300"/>
               </a:spcBef>
             </a:pPr>
             <a:r>
@@ -4132,7 +4400,7 @@
           <a:p>
             <a:pPr>
               <a:spcBef>
-                <a:spcPts val="800"/>
+                <a:spcPts val="400"/>
               </a:spcBef>
             </a:pPr>
             <a:r>
@@ -4142,28 +4410,256 @@
           <a:p>
             <a:pPr>
               <a:spcBef>
+                <a:spcPts val="1000"/>
+              </a:spcBef>
+            </a:pPr>
+            <a:r>
+              <a:t/>
+            </a:r>
+          </a:p>
+          <a:p>
+            <a:pPr>
+              <a:spcBef>
                 <a:spcPts val="400"/>
               </a:spcBef>
             </a:pPr>
             <a:r>
+              <a:t/>
+            </a:r>
+          </a:p>
+        </p:txBody>
+      </p:sp>
+      <p:sp>
+        <p:nvSpPr>
+          <p:cNvPr id="5" name="Rectangle 4"/>
+          <p:cNvSpPr/>
+          <p:nvPr/>
+        </p:nvSpPr>
+        <p:spPr>
+          <a:xfrm>
+            <a:off x="548640" y="3565880"/>
+            <a:ext cx="73152" cy="502880"/>
+          </a:xfrm>
+          <a:prstGeom prst="rect">
+            <a:avLst/>
+          </a:prstGeom>
+          <a:solidFill>
+            <a:srgbClr val="0F3460"/>
+          </a:solidFill>
+          <a:ln>
+            <a:noFill/>
+          </a:ln>
+        </p:spPr>
+        <p:style>
+          <a:lnRef idx="1">
+            <a:schemeClr val="accent1"/>
+          </a:lnRef>
+          <a:fillRef idx="3">
+            <a:schemeClr val="accent1"/>
+          </a:fillRef>
+          <a:effectRef idx="2">
+            <a:schemeClr val="accent1"/>
+          </a:effectRef>
+          <a:fontRef idx="minor">
+            <a:schemeClr val="lt1"/>
+          </a:fontRef>
+        </p:style>
+        <p:txBody>
+          <a:bodyPr rtlCol="0" anchor="ctr"/>
+          <a:lstStyle/>
+          <a:p>
+            <a:pPr algn="ctr"/>
+          </a:p>
+        </p:txBody>
+      </p:sp>
+      <p:sp>
+        <p:nvSpPr>
+          <p:cNvPr id="6" name="Rectangle 5"/>
+          <p:cNvSpPr/>
+          <p:nvPr/>
+        </p:nvSpPr>
+        <p:spPr>
+          <a:xfrm>
+            <a:off x="621792" y="3565880"/>
+            <a:ext cx="11018520" cy="502880"/>
+          </a:xfrm>
+          <a:prstGeom prst="rect">
+            <a:avLst/>
+          </a:prstGeom>
+          <a:solidFill>
+            <a:srgbClr val="E8F0FE"/>
+          </a:solidFill>
+          <a:ln>
+            <a:noFill/>
+          </a:ln>
+        </p:spPr>
+        <p:style>
+          <a:lnRef idx="1">
+            <a:schemeClr val="accent1"/>
+          </a:lnRef>
+          <a:fillRef idx="3">
+            <a:schemeClr val="accent1"/>
+          </a:fillRef>
+          <a:effectRef idx="2">
+            <a:schemeClr val="accent1"/>
+          </a:effectRef>
+          <a:fontRef idx="minor">
+            <a:schemeClr val="lt1"/>
+          </a:fontRef>
+        </p:style>
+        <p:txBody>
+          <a:bodyPr rtlCol="0" anchor="ctr"/>
+          <a:lstStyle/>
+          <a:p>
+            <a:pPr algn="ctr"/>
+          </a:p>
+        </p:txBody>
+      </p:sp>
+      <p:sp>
+        <p:nvSpPr>
+          <p:cNvPr id="7" name="TextBox 6"/>
+          <p:cNvSpPr txBox="1"/>
+          <p:nvPr/>
+        </p:nvSpPr>
+        <p:spPr>
+          <a:xfrm>
+            <a:off x="777240" y="3657320"/>
+            <a:ext cx="10771632" cy="411440"/>
+          </a:xfrm>
+          <a:prstGeom prst="rect">
+            <a:avLst/>
+          </a:prstGeom>
+          <a:noFill/>
+        </p:spPr>
+        <p:txBody>
+          <a:bodyPr wrap="square">
+            <a:spAutoFit/>
+          </a:bodyPr>
+          <a:lstStyle/>
+          <a:p>
+            <a:r>
               <a:rPr sz="2000" i="1">
                 <a:solidFill>
-                  <a:srgbClr val="555555"/>
+                  <a:srgbClr val="16213E"/>
                 </a:solidFill>
               </a:rPr>
               <a:t>All examples and commands in this course are verified on</a:t>
             </a:r>
           </a:p>
-          <a:p>
-            <a:pPr>
-              <a:spcBef>
-                <a:spcPts val="400"/>
-              </a:spcBef>
-            </a:pPr>
+        </p:txBody>
+      </p:sp>
+      <p:sp>
+        <p:nvSpPr>
+          <p:cNvPr id="8" name="Rectangle 7"/>
+          <p:cNvSpPr/>
+          <p:nvPr/>
+        </p:nvSpPr>
+        <p:spPr>
+          <a:xfrm>
+            <a:off x="548640" y="4160200"/>
+            <a:ext cx="73152" cy="502880"/>
+          </a:xfrm>
+          <a:prstGeom prst="rect">
+            <a:avLst/>
+          </a:prstGeom>
+          <a:solidFill>
+            <a:srgbClr val="0F3460"/>
+          </a:solidFill>
+          <a:ln>
+            <a:noFill/>
+          </a:ln>
+        </p:spPr>
+        <p:style>
+          <a:lnRef idx="1">
+            <a:schemeClr val="accent1"/>
+          </a:lnRef>
+          <a:fillRef idx="3">
+            <a:schemeClr val="accent1"/>
+          </a:fillRef>
+          <a:effectRef idx="2">
+            <a:schemeClr val="accent1"/>
+          </a:effectRef>
+          <a:fontRef idx="minor">
+            <a:schemeClr val="lt1"/>
+          </a:fontRef>
+        </p:style>
+        <p:txBody>
+          <a:bodyPr rtlCol="0" anchor="ctr"/>
+          <a:lstStyle/>
+          <a:p>
+            <a:pPr algn="ctr"/>
+          </a:p>
+        </p:txBody>
+      </p:sp>
+      <p:sp>
+        <p:nvSpPr>
+          <p:cNvPr id="9" name="Rectangle 8"/>
+          <p:cNvSpPr/>
+          <p:nvPr/>
+        </p:nvSpPr>
+        <p:spPr>
+          <a:xfrm>
+            <a:off x="621792" y="4160200"/>
+            <a:ext cx="11018520" cy="502880"/>
+          </a:xfrm>
+          <a:prstGeom prst="rect">
+            <a:avLst/>
+          </a:prstGeom>
+          <a:solidFill>
+            <a:srgbClr val="E8F0FE"/>
+          </a:solidFill>
+          <a:ln>
+            <a:noFill/>
+          </a:ln>
+        </p:spPr>
+        <p:style>
+          <a:lnRef idx="1">
+            <a:schemeClr val="accent1"/>
+          </a:lnRef>
+          <a:fillRef idx="3">
+            <a:schemeClr val="accent1"/>
+          </a:fillRef>
+          <a:effectRef idx="2">
+            <a:schemeClr val="accent1"/>
+          </a:effectRef>
+          <a:fontRef idx="minor">
+            <a:schemeClr val="lt1"/>
+          </a:fontRef>
+        </p:style>
+        <p:txBody>
+          <a:bodyPr rtlCol="0" anchor="ctr"/>
+          <a:lstStyle/>
+          <a:p>
+            <a:pPr algn="ctr"/>
+          </a:p>
+        </p:txBody>
+      </p:sp>
+      <p:sp>
+        <p:nvSpPr>
+          <p:cNvPr id="10" name="TextBox 9"/>
+          <p:cNvSpPr txBox="1"/>
+          <p:nvPr/>
+        </p:nvSpPr>
+        <p:spPr>
+          <a:xfrm>
+            <a:off x="777240" y="4251640"/>
+            <a:ext cx="10771632" cy="411440"/>
+          </a:xfrm>
+          <a:prstGeom prst="rect">
+            <a:avLst/>
+          </a:prstGeom>
+          <a:noFill/>
+        </p:spPr>
+        <p:txBody>
+          <a:bodyPr wrap="square">
+            <a:spAutoFit/>
+          </a:bodyPr>
+          <a:lstStyle/>
+          <a:p>
             <a:r>
               <a:rPr sz="2000" i="1">
                 <a:solidFill>
-                  <a:srgbClr val="555555"/>
+                  <a:srgbClr val="16213E"/>
                 </a:solidFill>
               </a:rPr>
               <a:t>Windows 11, Ubuntu 22.04, and macOS 14 (Sonoma).</a:t>
@@ -4191,47 +4687,14 @@
       <p:grpSpPr/>
       <p:sp>
         <p:nvSpPr>
-          <p:cNvPr id="2" name="TextBox 1"/>
-          <p:cNvSpPr txBox="1"/>
-          <p:nvPr/>
-        </p:nvSpPr>
-        <p:spPr>
-          <a:xfrm>
-            <a:off x="365760" y="182880"/>
-            <a:ext cx="11430000" cy="731520"/>
-          </a:xfrm>
-          <a:prstGeom prst="rect">
-            <a:avLst/>
-          </a:prstGeom>
-          <a:noFill/>
-        </p:spPr>
-        <p:txBody>
-          <a:bodyPr wrap="none">
-            <a:spAutoFit/>
-          </a:bodyPr>
-          <a:lstStyle/>
-          <a:p>
-            <a:r>
-              <a:rPr sz="3200" b="1">
-                <a:solidFill>
-                  <a:srgbClr val="0F3460"/>
-                </a:solidFill>
-              </a:rPr>
-              <a:t>Programming Language</a:t>
-            </a:r>
-          </a:p>
-        </p:txBody>
-      </p:sp>
-      <p:sp>
-        <p:nvSpPr>
-          <p:cNvPr id="3" name="Rectangle 2"/>
+          <p:cNvPr id="2" name="Rectangle 1"/>
           <p:cNvSpPr/>
           <p:nvPr/>
         </p:nvSpPr>
         <p:spPr>
           <a:xfrm>
-            <a:off x="365760" y="914400"/>
-            <a:ext cx="11430000" cy="36000"/>
+            <a:off x="0" y="0"/>
+            <a:ext cx="12188952" cy="1188720"/>
           </a:xfrm>
           <a:prstGeom prst="rect">
             <a:avLst/>
@@ -4267,14 +4730,14 @@
       </p:sp>
       <p:sp>
         <p:nvSpPr>
-          <p:cNvPr id="4" name="TextBox 3"/>
+          <p:cNvPr id="3" name="TextBox 2"/>
           <p:cNvSpPr txBox="1"/>
           <p:nvPr/>
         </p:nvSpPr>
         <p:spPr>
           <a:xfrm>
-            <a:off x="365760" y="1051560"/>
-            <a:ext cx="11430000" cy="5577840"/>
+            <a:off x="548640" y="182880"/>
+            <a:ext cx="11091672" cy="822960"/>
           </a:xfrm>
           <a:prstGeom prst="rect">
             <a:avLst/>
@@ -4287,8 +4750,51 @@
           </a:bodyPr>
           <a:lstStyle/>
           <a:p>
+            <a:r>
+              <a:rPr b="1" sz="3200">
+                <a:solidFill>
+                  <a:srgbClr val="FFFFFF"/>
+                </a:solidFill>
+              </a:rPr>
+              <a:t>Programming Language</a:t>
+            </a:r>
+          </a:p>
+        </p:txBody>
+      </p:sp>
+      <p:sp>
+        <p:nvSpPr>
+          <p:cNvPr id="4" name="TextBox 3"/>
+          <p:cNvSpPr txBox="1"/>
+          <p:nvPr/>
+        </p:nvSpPr>
+        <p:spPr>
+          <a:xfrm>
+            <a:off x="548640" y="1325880"/>
+            <a:ext cx="11091672" cy="2560000"/>
+          </a:xfrm>
+          <a:prstGeom prst="rect">
+            <a:avLst/>
+          </a:prstGeom>
+          <a:noFill/>
+        </p:spPr>
+        <p:txBody>
+          <a:bodyPr wrap="square">
+            <a:spAutoFit/>
+          </a:bodyPr>
+          <a:lstStyle/>
+          <a:p>
             <a:pPr>
               <a:spcBef>
+                <a:spcPts val="400"/>
+              </a:spcBef>
+            </a:pPr>
+            <a:r>
+              <a:t/>
+            </a:r>
+          </a:p>
+          <a:p>
+            <a:pPr>
+              <a:spcBef>
                 <a:spcPts val="800"/>
               </a:spcBef>
             </a:pPr>
@@ -4304,7 +4810,17 @@
           <a:p>
             <a:pPr>
               <a:spcBef>
-                <a:spcPts val="200"/>
+                <a:spcPts val="400"/>
+              </a:spcBef>
+            </a:pPr>
+            <a:r>
+              <a:t/>
+            </a:r>
+          </a:p>
+          <a:p>
+            <a:pPr>
+              <a:spcBef>
+                <a:spcPts val="300"/>
               </a:spcBef>
             </a:pPr>
             <a:r>
@@ -4335,7 +4851,7 @@
           <a:p>
             <a:pPr>
               <a:spcBef>
-                <a:spcPts val="200"/>
+                <a:spcPts val="300"/>
               </a:spcBef>
             </a:pPr>
             <a:r>
@@ -4366,7 +4882,7 @@
           <a:p>
             <a:pPr>
               <a:spcBef>
-                <a:spcPts val="200"/>
+                <a:spcPts val="300"/>
               </a:spcBef>
             </a:pPr>
             <a:r>
@@ -4394,13 +4910,61 @@
               <a:t> — </a:t>
             </a:r>
             <a:r>
+              <a:rPr sz="2000">
+                <a:solidFill>
+                  <a:srgbClr val="111111"/>
+                </a:solidFill>
+                <a:latin typeface="Courier New"/>
+              </a:rPr>
+              <a:t>confluent-kafka</a:t>
+            </a:r>
+            <a:r>
               <a:rPr sz="2200">
                 <a:solidFill>
                   <a:srgbClr val="111111"/>
                 </a:solidFill>
+              </a:rPr>
+              <a:t> library covers most topics</a:t>
+            </a:r>
+          </a:p>
+          <a:p>
+            <a:pPr>
+              <a:spcBef>
+                <a:spcPts val="300"/>
+              </a:spcBef>
+            </a:pPr>
+            <a:r>
+              <a:rPr sz="2200">
+                <a:solidFill>
+                  <a:srgbClr val="111111"/>
+                </a:solidFill>
+              </a:rPr>
+              <a:t>• </a:t>
+            </a:r>
+            <a:r>
+              <a:rPr b="1" sz="2200">
+                <a:solidFill>
+                  <a:srgbClr val="111111"/>
+                </a:solidFill>
+              </a:rPr>
+              <a:t>C#</a:t>
+            </a:r>
+            <a:r>
+              <a:rPr sz="2200">
+                <a:solidFill>
+                  <a:srgbClr val="111111"/>
+                </a:solidFill>
+              </a:rPr>
+              <a:t> — </a:t>
+            </a:r>
+            <a:r>
+              <a:rPr sz="2000">
+                <a:solidFill>
+                  <a:srgbClr val="111111"/>
+                </a:solidFill>
                 <a:latin typeface="Courier New"/>
               </a:rPr>
-              <a:t>confluent-kafka</a:t>
+              <a:t>Confluent.Kafka</a:t>
             </a:r>
             <a:r>
               <a:rPr sz="2200">
@@ -4408,13 +4972,13 @@
                   <a:srgbClr val="111111"/>
                 </a:solidFill>
               </a:rPr>
-              <a:t> library covers most topics</a:t>
+              <a:t> NuGet package</a:t>
             </a:r>
           </a:p>
           <a:p>
             <a:pPr>
               <a:spcBef>
-                <a:spcPts val="200"/>
+                <a:spcPts val="300"/>
               </a:spcBef>
             </a:pPr>
             <a:r>
@@ -4431,7 +4995,7 @@
                   <a:srgbClr val="111111"/>
                 </a:solidFill>
               </a:rPr>
-              <a:t>C#</a:t>
+              <a:t>Others</a:t>
             </a:r>
             <a:r>
               <a:rPr sz="2200">
@@ -4439,61 +5003,23 @@
                   <a:srgbClr val="111111"/>
                 </a:solidFill>
               </a:rPr>
-              <a:t> — </a:t>
-            </a:r>
-            <a:r>
-              <a:rPr sz="2200">
-                <a:solidFill>
-                  <a:srgbClr val="111111"/>
-                </a:solidFill>
-                <a:latin typeface="Courier New"/>
-              </a:rPr>
-              <a:t>Confluent.Kafka</a:t>
-            </a:r>
-            <a:r>
-              <a:rPr sz="2200">
-                <a:solidFill>
-                  <a:srgbClr val="111111"/>
-                </a:solidFill>
-              </a:rPr>
-              <a:t> NuGet package</a:t>
+              <a:t> — any language with a Kafka client library</a:t>
             </a:r>
           </a:p>
           <a:p>
             <a:pPr>
               <a:spcBef>
-                <a:spcPts val="200"/>
-              </a:spcBef>
-            </a:pPr>
-            <a:r>
-              <a:rPr sz="2200">
-                <a:solidFill>
-                  <a:srgbClr val="111111"/>
-                </a:solidFill>
-              </a:rPr>
-              <a:t>• </a:t>
-            </a:r>
-            <a:r>
-              <a:rPr b="1" sz="2200">
-                <a:solidFill>
-                  <a:srgbClr val="111111"/>
-                </a:solidFill>
-              </a:rPr>
-              <a:t>Others</a:t>
-            </a:r>
-            <a:r>
-              <a:rPr sz="2200">
-                <a:solidFill>
-                  <a:srgbClr val="111111"/>
-                </a:solidFill>
-              </a:rPr>
-              <a:t> — any language with a Kafka client library</a:t>
+                <a:spcPts val="400"/>
+              </a:spcBef>
+            </a:pPr>
+            <a:r>
+              <a:t/>
             </a:r>
           </a:p>
           <a:p>
             <a:pPr>
               <a:spcBef>
-                <a:spcPts val="800"/>
+                <a:spcPts val="1000"/>
               </a:spcBef>
             </a:pPr>
             <a:r>
@@ -4507,9 +5033,123 @@
               </a:spcBef>
             </a:pPr>
             <a:r>
+              <a:t/>
+            </a:r>
+          </a:p>
+        </p:txBody>
+      </p:sp>
+      <p:sp>
+        <p:nvSpPr>
+          <p:cNvPr id="5" name="Rectangle 4"/>
+          <p:cNvSpPr/>
+          <p:nvPr/>
+        </p:nvSpPr>
+        <p:spPr>
+          <a:xfrm>
+            <a:off x="548640" y="3885880"/>
+            <a:ext cx="73152" cy="502880"/>
+          </a:xfrm>
+          <a:prstGeom prst="rect">
+            <a:avLst/>
+          </a:prstGeom>
+          <a:solidFill>
+            <a:srgbClr val="0F3460"/>
+          </a:solidFill>
+          <a:ln>
+            <a:noFill/>
+          </a:ln>
+        </p:spPr>
+        <p:style>
+          <a:lnRef idx="1">
+            <a:schemeClr val="accent1"/>
+          </a:lnRef>
+          <a:fillRef idx="3">
+            <a:schemeClr val="accent1"/>
+          </a:fillRef>
+          <a:effectRef idx="2">
+            <a:schemeClr val="accent1"/>
+          </a:effectRef>
+          <a:fontRef idx="minor">
+            <a:schemeClr val="lt1"/>
+          </a:fontRef>
+        </p:style>
+        <p:txBody>
+          <a:bodyPr rtlCol="0" anchor="ctr"/>
+          <a:lstStyle/>
+          <a:p>
+            <a:pPr algn="ctr"/>
+          </a:p>
+        </p:txBody>
+      </p:sp>
+      <p:sp>
+        <p:nvSpPr>
+          <p:cNvPr id="6" name="Rectangle 5"/>
+          <p:cNvSpPr/>
+          <p:nvPr/>
+        </p:nvSpPr>
+        <p:spPr>
+          <a:xfrm>
+            <a:off x="621792" y="3885880"/>
+            <a:ext cx="11018520" cy="502880"/>
+          </a:xfrm>
+          <a:prstGeom prst="rect">
+            <a:avLst/>
+          </a:prstGeom>
+          <a:solidFill>
+            <a:srgbClr val="E8F0FE"/>
+          </a:solidFill>
+          <a:ln>
+            <a:noFill/>
+          </a:ln>
+        </p:spPr>
+        <p:style>
+          <a:lnRef idx="1">
+            <a:schemeClr val="accent1"/>
+          </a:lnRef>
+          <a:fillRef idx="3">
+            <a:schemeClr val="accent1"/>
+          </a:fillRef>
+          <a:effectRef idx="2">
+            <a:schemeClr val="accent1"/>
+          </a:effectRef>
+          <a:fontRef idx="minor">
+            <a:schemeClr val="lt1"/>
+          </a:fontRef>
+        </p:style>
+        <p:txBody>
+          <a:bodyPr rtlCol="0" anchor="ctr"/>
+          <a:lstStyle/>
+          <a:p>
+            <a:pPr algn="ctr"/>
+          </a:p>
+        </p:txBody>
+      </p:sp>
+      <p:sp>
+        <p:nvSpPr>
+          <p:cNvPr id="7" name="TextBox 6"/>
+          <p:cNvSpPr txBox="1"/>
+          <p:nvPr/>
+        </p:nvSpPr>
+        <p:spPr>
+          <a:xfrm>
+            <a:off x="777240" y="3977320"/>
+            <a:ext cx="10771632" cy="411440"/>
+          </a:xfrm>
+          <a:prstGeom prst="rect">
+            <a:avLst/>
+          </a:prstGeom>
+          <a:noFill/>
+        </p:spPr>
+        <p:txBody>
+          <a:bodyPr wrap="square">
+            <a:spAutoFit/>
+          </a:bodyPr>
+          <a:lstStyle/>
+          <a:p>
+            <a:r>
               <a:rPr sz="2000" i="1">
                 <a:solidFill>
-                  <a:srgbClr val="555555"/>
+                  <a:srgbClr val="16213E"/>
                 </a:solidFill>
               </a:rPr>
               <a:t>Code examples are in </a:t>
@@ -4517,7 +5157,7 @@
             <a:r>
               <a:rPr b="1" sz="2000" i="1">
                 <a:solidFill>
-                  <a:srgbClr val="555555"/>
+                  <a:srgbClr val="16213E"/>
                 </a:solidFill>
               </a:rPr>
               <a:t>Kotlin + Spring Boot</a:t>
@@ -4525,22 +5165,126 @@
             <a:r>
               <a:rPr sz="2000" i="1">
                 <a:solidFill>
-                  <a:srgbClr val="555555"/>
+                  <a:srgbClr val="16213E"/>
                 </a:solidFill>
               </a:rPr>
               <a:t>.</a:t>
             </a:r>
           </a:p>
-          <a:p>
-            <a:pPr>
-              <a:spcBef>
-                <a:spcPts val="400"/>
-              </a:spcBef>
-            </a:pPr>
+        </p:txBody>
+      </p:sp>
+      <p:sp>
+        <p:nvSpPr>
+          <p:cNvPr id="8" name="Rectangle 7"/>
+          <p:cNvSpPr/>
+          <p:nvPr/>
+        </p:nvSpPr>
+        <p:spPr>
+          <a:xfrm>
+            <a:off x="548640" y="4480200"/>
+            <a:ext cx="73152" cy="502880"/>
+          </a:xfrm>
+          <a:prstGeom prst="rect">
+            <a:avLst/>
+          </a:prstGeom>
+          <a:solidFill>
+            <a:srgbClr val="0F3460"/>
+          </a:solidFill>
+          <a:ln>
+            <a:noFill/>
+          </a:ln>
+        </p:spPr>
+        <p:style>
+          <a:lnRef idx="1">
+            <a:schemeClr val="accent1"/>
+          </a:lnRef>
+          <a:fillRef idx="3">
+            <a:schemeClr val="accent1"/>
+          </a:fillRef>
+          <a:effectRef idx="2">
+            <a:schemeClr val="accent1"/>
+          </a:effectRef>
+          <a:fontRef idx="minor">
+            <a:schemeClr val="lt1"/>
+          </a:fontRef>
+        </p:style>
+        <p:txBody>
+          <a:bodyPr rtlCol="0" anchor="ctr"/>
+          <a:lstStyle/>
+          <a:p>
+            <a:pPr algn="ctr"/>
+          </a:p>
+        </p:txBody>
+      </p:sp>
+      <p:sp>
+        <p:nvSpPr>
+          <p:cNvPr id="9" name="Rectangle 8"/>
+          <p:cNvSpPr/>
+          <p:nvPr/>
+        </p:nvSpPr>
+        <p:spPr>
+          <a:xfrm>
+            <a:off x="621792" y="4480200"/>
+            <a:ext cx="11018520" cy="502880"/>
+          </a:xfrm>
+          <a:prstGeom prst="rect">
+            <a:avLst/>
+          </a:prstGeom>
+          <a:solidFill>
+            <a:srgbClr val="E8F0FE"/>
+          </a:solidFill>
+          <a:ln>
+            <a:noFill/>
+          </a:ln>
+        </p:spPr>
+        <p:style>
+          <a:lnRef idx="1">
+            <a:schemeClr val="accent1"/>
+          </a:lnRef>
+          <a:fillRef idx="3">
+            <a:schemeClr val="accent1"/>
+          </a:fillRef>
+          <a:effectRef idx="2">
+            <a:schemeClr val="accent1"/>
+          </a:effectRef>
+          <a:fontRef idx="minor">
+            <a:schemeClr val="lt1"/>
+          </a:fontRef>
+        </p:style>
+        <p:txBody>
+          <a:bodyPr rtlCol="0" anchor="ctr"/>
+          <a:lstStyle/>
+          <a:p>
+            <a:pPr algn="ctr"/>
+          </a:p>
+        </p:txBody>
+      </p:sp>
+      <p:sp>
+        <p:nvSpPr>
+          <p:cNvPr id="10" name="TextBox 9"/>
+          <p:cNvSpPr txBox="1"/>
+          <p:nvPr/>
+        </p:nvSpPr>
+        <p:spPr>
+          <a:xfrm>
+            <a:off x="777240" y="4571640"/>
+            <a:ext cx="10771632" cy="411440"/>
+          </a:xfrm>
+          <a:prstGeom prst="rect">
+            <a:avLst/>
+          </a:prstGeom>
+          <a:noFill/>
+        </p:spPr>
+        <p:txBody>
+          <a:bodyPr wrap="square">
+            <a:spAutoFit/>
+          </a:bodyPr>
+          <a:lstStyle/>
+          <a:p>
             <a:r>
               <a:rPr sz="2000" i="1">
                 <a:solidFill>
-                  <a:srgbClr val="555555"/>
+                  <a:srgbClr val="16213E"/>
                 </a:solidFill>
               </a:rPr>
               <a:t>The Kafka concepts and configuration are </a:t>
@@ -4548,7 +5292,7 @@
             <a:r>
               <a:rPr b="1" sz="2000" i="1">
                 <a:solidFill>
-                  <a:srgbClr val="555555"/>
+                  <a:srgbClr val="16213E"/>
                 </a:solidFill>
               </a:rPr>
               <a:t>language-agnostic</a:t>
@@ -4556,7 +5300,7 @@
             <a:r>
               <a:rPr sz="2000" i="1">
                 <a:solidFill>
-                  <a:srgbClr val="555555"/>
+                  <a:srgbClr val="16213E"/>
                 </a:solidFill>
               </a:rPr>
               <a:t>.</a:t>
@@ -4584,47 +5328,14 @@
       <p:grpSpPr/>
       <p:sp>
         <p:nvSpPr>
-          <p:cNvPr id="2" name="TextBox 1"/>
-          <p:cNvSpPr txBox="1"/>
-          <p:nvPr/>
-        </p:nvSpPr>
-        <p:spPr>
-          <a:xfrm>
-            <a:off x="365760" y="182880"/>
-            <a:ext cx="11430000" cy="731520"/>
-          </a:xfrm>
-          <a:prstGeom prst="rect">
-            <a:avLst/>
-          </a:prstGeom>
-          <a:noFill/>
-        </p:spPr>
-        <p:txBody>
-          <a:bodyPr wrap="none">
-            <a:spAutoFit/>
-          </a:bodyPr>
-          <a:lstStyle/>
-          <a:p>
-            <a:r>
-              <a:rPr sz="3200" b="1">
-                <a:solidFill>
-                  <a:srgbClr val="0F3460"/>
-                </a:solidFill>
-              </a:rPr>
-              <a:t>Docker Desktop — Setup</a:t>
-            </a:r>
-          </a:p>
-        </p:txBody>
-      </p:sp>
-      <p:sp>
-        <p:nvSpPr>
-          <p:cNvPr id="3" name="Rectangle 2"/>
+          <p:cNvPr id="2" name="Rectangle 1"/>
           <p:cNvSpPr/>
           <p:nvPr/>
         </p:nvSpPr>
         <p:spPr>
           <a:xfrm>
-            <a:off x="365760" y="914400"/>
-            <a:ext cx="11430000" cy="36000"/>
+            <a:off x="0" y="0"/>
+            <a:ext cx="12188952" cy="1188720"/>
           </a:xfrm>
           <a:prstGeom prst="rect">
             <a:avLst/>
@@ -4660,14 +5371,14 @@
       </p:sp>
       <p:sp>
         <p:nvSpPr>
-          <p:cNvPr id="4" name="TextBox 3"/>
+          <p:cNvPr id="3" name="TextBox 2"/>
           <p:cNvSpPr txBox="1"/>
           <p:nvPr/>
         </p:nvSpPr>
         <p:spPr>
           <a:xfrm>
-            <a:off x="365760" y="1051560"/>
-            <a:ext cx="11430000" cy="5577840"/>
+            <a:off x="548640" y="182880"/>
+            <a:ext cx="11091672" cy="822960"/>
           </a:xfrm>
           <a:prstGeom prst="rect">
             <a:avLst/>
@@ -4680,8 +5391,51 @@
           </a:bodyPr>
           <a:lstStyle/>
           <a:p>
+            <a:r>
+              <a:rPr b="1" sz="3200">
+                <a:solidFill>
+                  <a:srgbClr val="FFFFFF"/>
+                </a:solidFill>
+              </a:rPr>
+              <a:t>Docker Desktop — Setup</a:t>
+            </a:r>
+          </a:p>
+        </p:txBody>
+      </p:sp>
+      <p:sp>
+        <p:nvSpPr>
+          <p:cNvPr id="4" name="TextBox 3"/>
+          <p:cNvSpPr txBox="1"/>
+          <p:nvPr/>
+        </p:nvSpPr>
+        <p:spPr>
+          <a:xfrm>
+            <a:off x="548640" y="1325880"/>
+            <a:ext cx="11091672" cy="560000"/>
+          </a:xfrm>
+          <a:prstGeom prst="rect">
+            <a:avLst/>
+          </a:prstGeom>
+          <a:noFill/>
+        </p:spPr>
+        <p:txBody>
+          <a:bodyPr wrap="square">
+            <a:spAutoFit/>
+          </a:bodyPr>
+          <a:lstStyle/>
+          <a:p>
             <a:pPr>
               <a:spcBef>
+                <a:spcPts val="400"/>
+              </a:spcBef>
+            </a:pPr>
+            <a:r>
+              <a:t/>
+            </a:r>
+          </a:p>
+          <a:p>
+            <a:pPr>
+              <a:spcBef>
                 <a:spcPts val="800"/>
               </a:spcBef>
             </a:pPr>
@@ -4697,12 +5451,80 @@
           <a:p>
             <a:pPr>
               <a:spcBef>
-                <a:spcPts val="600"/>
-              </a:spcBef>
-              <a:spcAft>
-                <a:spcPts val="600"/>
-              </a:spcAft>
-            </a:pPr>
+                <a:spcPts val="400"/>
+              </a:spcBef>
+            </a:pPr>
+            <a:r>
+              <a:t/>
+            </a:r>
+          </a:p>
+        </p:txBody>
+      </p:sp>
+      <p:sp>
+        <p:nvSpPr>
+          <p:cNvPr id="5" name="Rectangle 4"/>
+          <p:cNvSpPr/>
+          <p:nvPr/>
+        </p:nvSpPr>
+        <p:spPr>
+          <a:xfrm>
+            <a:off x="548640" y="1885880"/>
+            <a:ext cx="11091672" cy="1005840"/>
+          </a:xfrm>
+          <a:prstGeom prst="rect">
+            <a:avLst/>
+          </a:prstGeom>
+          <a:solidFill>
+            <a:srgbClr val="1E1E1E"/>
+          </a:solidFill>
+          <a:ln>
+            <a:noFill/>
+          </a:ln>
+        </p:spPr>
+        <p:style>
+          <a:lnRef idx="1">
+            <a:schemeClr val="accent1"/>
+          </a:lnRef>
+          <a:fillRef idx="3">
+            <a:schemeClr val="accent1"/>
+          </a:fillRef>
+          <a:effectRef idx="2">
+            <a:schemeClr val="accent1"/>
+          </a:effectRef>
+          <a:fontRef idx="minor">
+            <a:schemeClr val="lt1"/>
+          </a:fontRef>
+        </p:style>
+        <p:txBody>
+          <a:bodyPr rtlCol="0" anchor="ctr"/>
+          <a:lstStyle/>
+          <a:p>
+            <a:pPr algn="ctr"/>
+          </a:p>
+        </p:txBody>
+      </p:sp>
+      <p:sp>
+        <p:nvSpPr>
+          <p:cNvPr id="6" name="TextBox 5"/>
+          <p:cNvSpPr txBox="1"/>
+          <p:nvPr/>
+        </p:nvSpPr>
+        <p:spPr>
+          <a:xfrm>
+            <a:off x="731520" y="2023040"/>
+            <a:ext cx="10908792" cy="731520"/>
+          </a:xfrm>
+          <a:prstGeom prst="rect">
+            <a:avLst/>
+          </a:prstGeom>
+          <a:noFill/>
+        </p:spPr>
+        <p:txBody>
+          <a:bodyPr wrap="square">
+            <a:spAutoFit/>
+          </a:bodyPr>
+          <a:lstStyle/>
+          <a:p>
             <a:r>
               <a:rPr sz="1600">
                 <a:solidFill>
@@ -4710,14 +5532,67 @@
                 </a:solidFill>
                 <a:latin typeface="Courier New"/>
               </a:rPr>
-              <a:t>https://hub.docker.com
-  → Sign Up (free account)
-  → Verify email</a:t>
-            </a:r>
-          </a:p>
+              <a:t>https://hub.docker.com</a:t>
+            </a:r>
+          </a:p>
+          <a:p>
+            <a:r>
+              <a:rPr sz="1600">
+                <a:solidFill>
+                  <a:srgbClr val="D4D4D4"/>
+                </a:solidFill>
+                <a:latin typeface="Courier New"/>
+              </a:rPr>
+              <a:t>  → Sign Up (free account)</a:t>
+            </a:r>
+          </a:p>
+          <a:p>
+            <a:r>
+              <a:rPr sz="1600">
+                <a:solidFill>
+                  <a:srgbClr val="D4D4D4"/>
+                </a:solidFill>
+                <a:latin typeface="Courier New"/>
+              </a:rPr>
+              <a:t>  → Verify email</a:t>
+            </a:r>
+          </a:p>
+        </p:txBody>
+      </p:sp>
+      <p:sp>
+        <p:nvSpPr>
+          <p:cNvPr id="7" name="TextBox 6"/>
+          <p:cNvSpPr txBox="1"/>
+          <p:nvPr/>
+        </p:nvSpPr>
+        <p:spPr>
+          <a:xfrm>
+            <a:off x="548640" y="2983160"/>
+            <a:ext cx="11091672" cy="560000"/>
+          </a:xfrm>
+          <a:prstGeom prst="rect">
+            <a:avLst/>
+          </a:prstGeom>
+          <a:noFill/>
+        </p:spPr>
+        <p:txBody>
+          <a:bodyPr wrap="square">
+            <a:spAutoFit/>
+          </a:bodyPr>
+          <a:lstStyle/>
           <a:p>
             <a:pPr>
               <a:spcBef>
+                <a:spcPts val="400"/>
+              </a:spcBef>
+            </a:pPr>
+            <a:r>
+              <a:t/>
+            </a:r>
+          </a:p>
+          <a:p>
+            <a:pPr>
+              <a:spcBef>
                 <a:spcPts val="800"/>
               </a:spcBef>
             </a:pPr>
@@ -4733,12 +5608,80 @@
           <a:p>
             <a:pPr>
               <a:spcBef>
-                <a:spcPts val="600"/>
-              </a:spcBef>
-              <a:spcAft>
-                <a:spcPts val="600"/>
-              </a:spcAft>
-            </a:pPr>
+                <a:spcPts val="400"/>
+              </a:spcBef>
+            </a:pPr>
+            <a:r>
+              <a:t/>
+            </a:r>
+          </a:p>
+        </p:txBody>
+      </p:sp>
+      <p:sp>
+        <p:nvSpPr>
+          <p:cNvPr id="8" name="Rectangle 7"/>
+          <p:cNvSpPr/>
+          <p:nvPr/>
+        </p:nvSpPr>
+        <p:spPr>
+          <a:xfrm>
+            <a:off x="548640" y="3543160"/>
+            <a:ext cx="11091672" cy="1234440"/>
+          </a:xfrm>
+          <a:prstGeom prst="rect">
+            <a:avLst/>
+          </a:prstGeom>
+          <a:solidFill>
+            <a:srgbClr val="1E1E1E"/>
+          </a:solidFill>
+          <a:ln>
+            <a:noFill/>
+          </a:ln>
+        </p:spPr>
+        <p:style>
+          <a:lnRef idx="1">
+            <a:schemeClr val="accent1"/>
+          </a:lnRef>
+          <a:fillRef idx="3">
+            <a:schemeClr val="accent1"/>
+          </a:fillRef>
+          <a:effectRef idx="2">
+            <a:schemeClr val="accent1"/>
+          </a:effectRef>
+          <a:fontRef idx="minor">
+            <a:schemeClr val="lt1"/>
+          </a:fontRef>
+        </p:style>
+        <p:txBody>
+          <a:bodyPr rtlCol="0" anchor="ctr"/>
+          <a:lstStyle/>
+          <a:p>
+            <a:pPr algn="ctr"/>
+          </a:p>
+        </p:txBody>
+      </p:sp>
+      <p:sp>
+        <p:nvSpPr>
+          <p:cNvPr id="9" name="TextBox 8"/>
+          <p:cNvSpPr txBox="1"/>
+          <p:nvPr/>
+        </p:nvSpPr>
+        <p:spPr>
+          <a:xfrm>
+            <a:off x="731520" y="3680320"/>
+            <a:ext cx="10908792" cy="960120"/>
+          </a:xfrm>
+          <a:prstGeom prst="rect">
+            <a:avLst/>
+          </a:prstGeom>
+          <a:noFill/>
+        </p:spPr>
+        <p:txBody>
+          <a:bodyPr wrap="square">
+            <a:spAutoFit/>
+          </a:bodyPr>
+          <a:lstStyle/>
+          <a:p>
             <a:r>
               <a:rPr sz="1600">
                 <a:solidFill>
@@ -4746,12 +5689,65 @@
                 </a:solidFill>
                 <a:latin typeface="Courier New"/>
               </a:rPr>
-              <a:t>https://www.docker.com/products/docker-desktop
-  → Choose your OS
-  → Install &amp; launch
-  → Sign In with Docker Hub credentials</a:t>
-            </a:r>
-          </a:p>
+              <a:t>https://www.docker.com/products/docker-desktop</a:t>
+            </a:r>
+          </a:p>
+          <a:p>
+            <a:r>
+              <a:rPr sz="1600">
+                <a:solidFill>
+                  <a:srgbClr val="D4D4D4"/>
+                </a:solidFill>
+                <a:latin typeface="Courier New"/>
+              </a:rPr>
+              <a:t>  → Choose your OS</a:t>
+            </a:r>
+          </a:p>
+          <a:p>
+            <a:r>
+              <a:rPr sz="1600">
+                <a:solidFill>
+                  <a:srgbClr val="D4D4D4"/>
+                </a:solidFill>
+                <a:latin typeface="Courier New"/>
+              </a:rPr>
+              <a:t>  → Install &amp; launch</a:t>
+            </a:r>
+          </a:p>
+          <a:p>
+            <a:r>
+              <a:rPr sz="1600">
+                <a:solidFill>
+                  <a:srgbClr val="D4D4D4"/>
+                </a:solidFill>
+                <a:latin typeface="Courier New"/>
+              </a:rPr>
+              <a:t>  → Sign In with Docker Hub credentials</a:t>
+            </a:r>
+          </a:p>
+        </p:txBody>
+      </p:sp>
+      <p:sp>
+        <p:nvSpPr>
+          <p:cNvPr id="10" name="TextBox 9"/>
+          <p:cNvSpPr txBox="1"/>
+          <p:nvPr/>
+        </p:nvSpPr>
+        <p:spPr>
+          <a:xfrm>
+            <a:off x="548640" y="4869040"/>
+            <a:ext cx="11091672" cy="300000"/>
+          </a:xfrm>
+          <a:prstGeom prst="rect">
+            <a:avLst/>
+          </a:prstGeom>
+          <a:noFill/>
+        </p:spPr>
+        <p:txBody>
+          <a:bodyPr wrap="square">
+            <a:spAutoFit/>
+          </a:bodyPr>
+          <a:lstStyle/>
           <a:p>
             <a:pPr>
               <a:spcBef>
@@ -4759,24 +5755,242 @@
               </a:spcBef>
             </a:pPr>
             <a:r>
+              <a:t/>
+            </a:r>
+          </a:p>
+        </p:txBody>
+      </p:sp>
+      <p:sp>
+        <p:nvSpPr>
+          <p:cNvPr id="11" name="Rectangle 10"/>
+          <p:cNvSpPr/>
+          <p:nvPr/>
+        </p:nvSpPr>
+        <p:spPr>
+          <a:xfrm>
+            <a:off x="548640" y="4969040"/>
+            <a:ext cx="73152" cy="502880"/>
+          </a:xfrm>
+          <a:prstGeom prst="rect">
+            <a:avLst/>
+          </a:prstGeom>
+          <a:solidFill>
+            <a:srgbClr val="0F3460"/>
+          </a:solidFill>
+          <a:ln>
+            <a:noFill/>
+          </a:ln>
+        </p:spPr>
+        <p:style>
+          <a:lnRef idx="1">
+            <a:schemeClr val="accent1"/>
+          </a:lnRef>
+          <a:fillRef idx="3">
+            <a:schemeClr val="accent1"/>
+          </a:fillRef>
+          <a:effectRef idx="2">
+            <a:schemeClr val="accent1"/>
+          </a:effectRef>
+          <a:fontRef idx="minor">
+            <a:schemeClr val="lt1"/>
+          </a:fontRef>
+        </p:style>
+        <p:txBody>
+          <a:bodyPr rtlCol="0" anchor="ctr"/>
+          <a:lstStyle/>
+          <a:p>
+            <a:pPr algn="ctr"/>
+          </a:p>
+        </p:txBody>
+      </p:sp>
+      <p:sp>
+        <p:nvSpPr>
+          <p:cNvPr id="12" name="Rectangle 11"/>
+          <p:cNvSpPr/>
+          <p:nvPr/>
+        </p:nvSpPr>
+        <p:spPr>
+          <a:xfrm>
+            <a:off x="621792" y="4969040"/>
+            <a:ext cx="11018520" cy="502880"/>
+          </a:xfrm>
+          <a:prstGeom prst="rect">
+            <a:avLst/>
+          </a:prstGeom>
+          <a:solidFill>
+            <a:srgbClr val="E8F0FE"/>
+          </a:solidFill>
+          <a:ln>
+            <a:noFill/>
+          </a:ln>
+        </p:spPr>
+        <p:style>
+          <a:lnRef idx="1">
+            <a:schemeClr val="accent1"/>
+          </a:lnRef>
+          <a:fillRef idx="3">
+            <a:schemeClr val="accent1"/>
+          </a:fillRef>
+          <a:effectRef idx="2">
+            <a:schemeClr val="accent1"/>
+          </a:effectRef>
+          <a:fontRef idx="minor">
+            <a:schemeClr val="lt1"/>
+          </a:fontRef>
+        </p:style>
+        <p:txBody>
+          <a:bodyPr rtlCol="0" anchor="ctr"/>
+          <a:lstStyle/>
+          <a:p>
+            <a:pPr algn="ctr"/>
+          </a:p>
+        </p:txBody>
+      </p:sp>
+      <p:sp>
+        <p:nvSpPr>
+          <p:cNvPr id="13" name="TextBox 12"/>
+          <p:cNvSpPr txBox="1"/>
+          <p:nvPr/>
+        </p:nvSpPr>
+        <p:spPr>
+          <a:xfrm>
+            <a:off x="777240" y="5060480"/>
+            <a:ext cx="10771632" cy="411440"/>
+          </a:xfrm>
+          <a:prstGeom prst="rect">
+            <a:avLst/>
+          </a:prstGeom>
+          <a:noFill/>
+        </p:spPr>
+        <p:txBody>
+          <a:bodyPr wrap="square">
+            <a:spAutoFit/>
+          </a:bodyPr>
+          <a:lstStyle/>
+          <a:p>
+            <a:r>
               <a:rPr sz="2000" i="1">
                 <a:solidFill>
-                  <a:srgbClr val="555555"/>
+                  <a:srgbClr val="16213E"/>
                 </a:solidFill>
               </a:rPr>
               <a:t>Docker Desktop includes: Docker Engine, Docker Compose, Docker CLI.</a:t>
             </a:r>
           </a:p>
-          <a:p>
-            <a:pPr>
-              <a:spcBef>
-                <a:spcPts val="400"/>
-              </a:spcBef>
-            </a:pPr>
+        </p:txBody>
+      </p:sp>
+      <p:sp>
+        <p:nvSpPr>
+          <p:cNvPr id="14" name="Rectangle 13"/>
+          <p:cNvSpPr/>
+          <p:nvPr/>
+        </p:nvSpPr>
+        <p:spPr>
+          <a:xfrm>
+            <a:off x="548640" y="5563360"/>
+            <a:ext cx="73152" cy="502880"/>
+          </a:xfrm>
+          <a:prstGeom prst="rect">
+            <a:avLst/>
+          </a:prstGeom>
+          <a:solidFill>
+            <a:srgbClr val="0F3460"/>
+          </a:solidFill>
+          <a:ln>
+            <a:noFill/>
+          </a:ln>
+        </p:spPr>
+        <p:style>
+          <a:lnRef idx="1">
+            <a:schemeClr val="accent1"/>
+          </a:lnRef>
+          <a:fillRef idx="3">
+            <a:schemeClr val="accent1"/>
+          </a:fillRef>
+          <a:effectRef idx="2">
+            <a:schemeClr val="accent1"/>
+          </a:effectRef>
+          <a:fontRef idx="minor">
+            <a:schemeClr val="lt1"/>
+          </a:fontRef>
+        </p:style>
+        <p:txBody>
+          <a:bodyPr rtlCol="0" anchor="ctr"/>
+          <a:lstStyle/>
+          <a:p>
+            <a:pPr algn="ctr"/>
+          </a:p>
+        </p:txBody>
+      </p:sp>
+      <p:sp>
+        <p:nvSpPr>
+          <p:cNvPr id="15" name="Rectangle 14"/>
+          <p:cNvSpPr/>
+          <p:nvPr/>
+        </p:nvSpPr>
+        <p:spPr>
+          <a:xfrm>
+            <a:off x="621792" y="5563360"/>
+            <a:ext cx="11018520" cy="502880"/>
+          </a:xfrm>
+          <a:prstGeom prst="rect">
+            <a:avLst/>
+          </a:prstGeom>
+          <a:solidFill>
+            <a:srgbClr val="E8F0FE"/>
+          </a:solidFill>
+          <a:ln>
+            <a:noFill/>
+          </a:ln>
+        </p:spPr>
+        <p:style>
+          <a:lnRef idx="1">
+            <a:schemeClr val="accent1"/>
+          </a:lnRef>
+          <a:fillRef idx="3">
+            <a:schemeClr val="accent1"/>
+          </a:fillRef>
+          <a:effectRef idx="2">
+            <a:schemeClr val="accent1"/>
+          </a:effectRef>
+          <a:fontRef idx="minor">
+            <a:schemeClr val="lt1"/>
+          </a:fontRef>
+        </p:style>
+        <p:txBody>
+          <a:bodyPr rtlCol="0" anchor="ctr"/>
+          <a:lstStyle/>
+          <a:p>
+            <a:pPr algn="ctr"/>
+          </a:p>
+        </p:txBody>
+      </p:sp>
+      <p:sp>
+        <p:nvSpPr>
+          <p:cNvPr id="16" name="TextBox 15"/>
+          <p:cNvSpPr txBox="1"/>
+          <p:nvPr/>
+        </p:nvSpPr>
+        <p:spPr>
+          <a:xfrm>
+            <a:off x="777240" y="5654800"/>
+            <a:ext cx="10771632" cy="411440"/>
+          </a:xfrm>
+          <a:prstGeom prst="rect">
+            <a:avLst/>
+          </a:prstGeom>
+          <a:noFill/>
+        </p:spPr>
+        <p:txBody>
+          <a:bodyPr wrap="square">
+            <a:spAutoFit/>
+          </a:bodyPr>
+          <a:lstStyle/>
+          <a:p>
             <a:r>
               <a:rPr sz="2000" i="1">
                 <a:solidFill>
-                  <a:srgbClr val="555555"/>
+                  <a:srgbClr val="16213E"/>
                 </a:solidFill>
               </a:rPr>
               <a:t>Everything needed to run Kafka locally is bundled here.</a:t>
@@ -4804,47 +6018,14 @@
       <p:grpSpPr/>
       <p:sp>
         <p:nvSpPr>
-          <p:cNvPr id="2" name="TextBox 1"/>
-          <p:cNvSpPr txBox="1"/>
-          <p:nvPr/>
-        </p:nvSpPr>
-        <p:spPr>
-          <a:xfrm>
-            <a:off x="365760" y="182880"/>
-            <a:ext cx="11430000" cy="731520"/>
-          </a:xfrm>
-          <a:prstGeom prst="rect">
-            <a:avLst/>
-          </a:prstGeom>
-          <a:noFill/>
-        </p:spPr>
-        <p:txBody>
-          <a:bodyPr wrap="none">
-            <a:spAutoFit/>
-          </a:bodyPr>
-          <a:lstStyle/>
-          <a:p>
-            <a:r>
-              <a:rPr sz="3200" b="1">
-                <a:solidFill>
-                  <a:srgbClr val="0F3460"/>
-                </a:solidFill>
-              </a:rPr>
-              <a:t>Git &amp; GitHub — Setup</a:t>
-            </a:r>
-          </a:p>
-        </p:txBody>
-      </p:sp>
-      <p:sp>
-        <p:nvSpPr>
-          <p:cNvPr id="3" name="Rectangle 2"/>
+          <p:cNvPr id="2" name="Rectangle 1"/>
           <p:cNvSpPr/>
           <p:nvPr/>
         </p:nvSpPr>
         <p:spPr>
           <a:xfrm>
-            <a:off x="365760" y="914400"/>
-            <a:ext cx="11430000" cy="36000"/>
+            <a:off x="0" y="0"/>
+            <a:ext cx="12188952" cy="1188720"/>
           </a:xfrm>
           <a:prstGeom prst="rect">
             <a:avLst/>
@@ -4880,14 +6061,14 @@
       </p:sp>
       <p:sp>
         <p:nvSpPr>
-          <p:cNvPr id="4" name="TextBox 3"/>
+          <p:cNvPr id="3" name="TextBox 2"/>
           <p:cNvSpPr txBox="1"/>
           <p:nvPr/>
         </p:nvSpPr>
         <p:spPr>
           <a:xfrm>
-            <a:off x="365760" y="1051560"/>
-            <a:ext cx="11430000" cy="5577840"/>
+            <a:off x="548640" y="182880"/>
+            <a:ext cx="11091672" cy="822960"/>
           </a:xfrm>
           <a:prstGeom prst="rect">
             <a:avLst/>
@@ -4900,8 +6081,51 @@
           </a:bodyPr>
           <a:lstStyle/>
           <a:p>
+            <a:r>
+              <a:rPr b="1" sz="3200">
+                <a:solidFill>
+                  <a:srgbClr val="FFFFFF"/>
+                </a:solidFill>
+              </a:rPr>
+              <a:t>Git &amp; GitHub — Setup</a:t>
+            </a:r>
+          </a:p>
+        </p:txBody>
+      </p:sp>
+      <p:sp>
+        <p:nvSpPr>
+          <p:cNvPr id="4" name="TextBox 3"/>
+          <p:cNvSpPr txBox="1"/>
+          <p:nvPr/>
+        </p:nvSpPr>
+        <p:spPr>
+          <a:xfrm>
+            <a:off x="548640" y="1325880"/>
+            <a:ext cx="11091672" cy="560000"/>
+          </a:xfrm>
+          <a:prstGeom prst="rect">
+            <a:avLst/>
+          </a:prstGeom>
+          <a:noFill/>
+        </p:spPr>
+        <p:txBody>
+          <a:bodyPr wrap="square">
+            <a:spAutoFit/>
+          </a:bodyPr>
+          <a:lstStyle/>
+          <a:p>
             <a:pPr>
               <a:spcBef>
+                <a:spcPts val="400"/>
+              </a:spcBef>
+            </a:pPr>
+            <a:r>
+              <a:t/>
+            </a:r>
+          </a:p>
+          <a:p>
+            <a:pPr>
+              <a:spcBef>
                 <a:spcPts val="800"/>
               </a:spcBef>
             </a:pPr>
@@ -4917,12 +6141,80 @@
           <a:p>
             <a:pPr>
               <a:spcBef>
-                <a:spcPts val="600"/>
-              </a:spcBef>
-              <a:spcAft>
-                <a:spcPts val="600"/>
-              </a:spcAft>
-            </a:pPr>
+                <a:spcPts val="400"/>
+              </a:spcBef>
+            </a:pPr>
+            <a:r>
+              <a:t/>
+            </a:r>
+          </a:p>
+        </p:txBody>
+      </p:sp>
+      <p:sp>
+        <p:nvSpPr>
+          <p:cNvPr id="5" name="Rectangle 4"/>
+          <p:cNvSpPr/>
+          <p:nvPr/>
+        </p:nvSpPr>
+        <p:spPr>
+          <a:xfrm>
+            <a:off x="548640" y="1885880"/>
+            <a:ext cx="11091672" cy="1005840"/>
+          </a:xfrm>
+          <a:prstGeom prst="rect">
+            <a:avLst/>
+          </a:prstGeom>
+          <a:solidFill>
+            <a:srgbClr val="1E1E1E"/>
+          </a:solidFill>
+          <a:ln>
+            <a:noFill/>
+          </a:ln>
+        </p:spPr>
+        <p:style>
+          <a:lnRef idx="1">
+            <a:schemeClr val="accent1"/>
+          </a:lnRef>
+          <a:fillRef idx="3">
+            <a:schemeClr val="accent1"/>
+          </a:fillRef>
+          <a:effectRef idx="2">
+            <a:schemeClr val="accent1"/>
+          </a:effectRef>
+          <a:fontRef idx="minor">
+            <a:schemeClr val="lt1"/>
+          </a:fontRef>
+        </p:style>
+        <p:txBody>
+          <a:bodyPr rtlCol="0" anchor="ctr"/>
+          <a:lstStyle/>
+          <a:p>
+            <a:pPr algn="ctr"/>
+          </a:p>
+        </p:txBody>
+      </p:sp>
+      <p:sp>
+        <p:nvSpPr>
+          <p:cNvPr id="6" name="TextBox 5"/>
+          <p:cNvSpPr txBox="1"/>
+          <p:nvPr/>
+        </p:nvSpPr>
+        <p:spPr>
+          <a:xfrm>
+            <a:off x="731520" y="2023040"/>
+            <a:ext cx="10908792" cy="731520"/>
+          </a:xfrm>
+          <a:prstGeom prst="rect">
+            <a:avLst/>
+          </a:prstGeom>
+          <a:noFill/>
+        </p:spPr>
+        <p:txBody>
+          <a:bodyPr wrap="square">
+            <a:spAutoFit/>
+          </a:bodyPr>
+          <a:lstStyle/>
+          <a:p>
             <a:r>
               <a:rPr sz="1600">
                 <a:solidFill>
@@ -4930,14 +6222,67 @@
                 </a:solidFill>
                 <a:latin typeface="Courier New"/>
               </a:rPr>
-              <a:t>https://github.com
-  → Sign Up (free account)
-  → Verify email</a:t>
-            </a:r>
-          </a:p>
+              <a:t>https://github.com</a:t>
+            </a:r>
+          </a:p>
+          <a:p>
+            <a:r>
+              <a:rPr sz="1600">
+                <a:solidFill>
+                  <a:srgbClr val="D4D4D4"/>
+                </a:solidFill>
+                <a:latin typeface="Courier New"/>
+              </a:rPr>
+              <a:t>  → Sign Up (free account)</a:t>
+            </a:r>
+          </a:p>
+          <a:p>
+            <a:r>
+              <a:rPr sz="1600">
+                <a:solidFill>
+                  <a:srgbClr val="D4D4D4"/>
+                </a:solidFill>
+                <a:latin typeface="Courier New"/>
+              </a:rPr>
+              <a:t>  → Verify email</a:t>
+            </a:r>
+          </a:p>
+        </p:txBody>
+      </p:sp>
+      <p:sp>
+        <p:nvSpPr>
+          <p:cNvPr id="7" name="TextBox 6"/>
+          <p:cNvSpPr txBox="1"/>
+          <p:nvPr/>
+        </p:nvSpPr>
+        <p:spPr>
+          <a:xfrm>
+            <a:off x="548640" y="2983160"/>
+            <a:ext cx="11091672" cy="560000"/>
+          </a:xfrm>
+          <a:prstGeom prst="rect">
+            <a:avLst/>
+          </a:prstGeom>
+          <a:noFill/>
+        </p:spPr>
+        <p:txBody>
+          <a:bodyPr wrap="square">
+            <a:spAutoFit/>
+          </a:bodyPr>
+          <a:lstStyle/>
           <a:p>
             <a:pPr>
               <a:spcBef>
+                <a:spcPts val="400"/>
+              </a:spcBef>
+            </a:pPr>
+            <a:r>
+              <a:t/>
+            </a:r>
+          </a:p>
+          <a:p>
+            <a:pPr>
+              <a:spcBef>
                 <a:spcPts val="800"/>
               </a:spcBef>
             </a:pPr>
@@ -4953,12 +6298,80 @@
           <a:p>
             <a:pPr>
               <a:spcBef>
-                <a:spcPts val="600"/>
-              </a:spcBef>
-              <a:spcAft>
-                <a:spcPts val="600"/>
-              </a:spcAft>
-            </a:pPr>
+                <a:spcPts val="400"/>
+              </a:spcBef>
+            </a:pPr>
+            <a:r>
+              <a:t/>
+            </a:r>
+          </a:p>
+        </p:txBody>
+      </p:sp>
+      <p:sp>
+        <p:nvSpPr>
+          <p:cNvPr id="8" name="Rectangle 7"/>
+          <p:cNvSpPr/>
+          <p:nvPr/>
+        </p:nvSpPr>
+        <p:spPr>
+          <a:xfrm>
+            <a:off x="548640" y="3543160"/>
+            <a:ext cx="11091672" cy="1920240"/>
+          </a:xfrm>
+          <a:prstGeom prst="rect">
+            <a:avLst/>
+          </a:prstGeom>
+          <a:solidFill>
+            <a:srgbClr val="1E1E1E"/>
+          </a:solidFill>
+          <a:ln>
+            <a:noFill/>
+          </a:ln>
+        </p:spPr>
+        <p:style>
+          <a:lnRef idx="1">
+            <a:schemeClr val="accent1"/>
+          </a:lnRef>
+          <a:fillRef idx="3">
+            <a:schemeClr val="accent1"/>
+          </a:fillRef>
+          <a:effectRef idx="2">
+            <a:schemeClr val="accent1"/>
+          </a:effectRef>
+          <a:fontRef idx="minor">
+            <a:schemeClr val="lt1"/>
+          </a:fontRef>
+        </p:style>
+        <p:txBody>
+          <a:bodyPr rtlCol="0" anchor="ctr"/>
+          <a:lstStyle/>
+          <a:p>
+            <a:pPr algn="ctr"/>
+          </a:p>
+        </p:txBody>
+      </p:sp>
+      <p:sp>
+        <p:nvSpPr>
+          <p:cNvPr id="9" name="TextBox 8"/>
+          <p:cNvSpPr txBox="1"/>
+          <p:nvPr/>
+        </p:nvSpPr>
+        <p:spPr>
+          <a:xfrm>
+            <a:off x="731520" y="3680320"/>
+            <a:ext cx="10908792" cy="1645920"/>
+          </a:xfrm>
+          <a:prstGeom prst="rect">
+            <a:avLst/>
+          </a:prstGeom>
+          <a:noFill/>
+        </p:spPr>
+        <p:txBody>
+          <a:bodyPr wrap="square">
+            <a:spAutoFit/>
+          </a:bodyPr>
+          <a:lstStyle/>
+          <a:p>
             <a:r>
               <a:rPr sz="1600">
                 <a:solidFill>
@@ -4966,14 +6379,98 @@
                 </a:solidFill>
                 <a:latin typeface="Courier New"/>
               </a:rPr>
-              <a:t># Windows: https://git-scm.com/download/win
-# Ubuntu / CentOS:
-sudo apt install git        # Ubuntu
-sudo yum install git        # CentOS
-# macOS:
-brew install git</a:t>
-            </a:r>
-          </a:p>
+              <a:t># Windows: https://git-scm.com/download/win</a:t>
+            </a:r>
+          </a:p>
+          <a:p>
+            <a:r>
+              <a:rPr sz="1600">
+                <a:solidFill>
+                  <a:srgbClr val="D4D4D4"/>
+                </a:solidFill>
+                <a:latin typeface="Courier New"/>
+              </a:rPr>
+              <a:t># Ubuntu / CentOS:</a:t>
+            </a:r>
+          </a:p>
+          <a:p>
+            <a:r>
+              <a:rPr sz="1600">
+                <a:solidFill>
+                  <a:srgbClr val="D4D4D4"/>
+                </a:solidFill>
+                <a:latin typeface="Courier New"/>
+              </a:rPr>
+              <a:t>sudo apt install git        # Ubuntu</a:t>
+            </a:r>
+          </a:p>
+          <a:p>
+            <a:r>
+              <a:rPr sz="1600">
+                <a:solidFill>
+                  <a:srgbClr val="D4D4D4"/>
+                </a:solidFill>
+                <a:latin typeface="Courier New"/>
+              </a:rPr>
+              <a:t>sudo yum install git        # CentOS</a:t>
+            </a:r>
+          </a:p>
+          <a:p>
+            <a:r>
+              <a:rPr sz="1600">
+                <a:solidFill>
+                  <a:srgbClr val="D4D4D4"/>
+                </a:solidFill>
+                <a:latin typeface="Courier New"/>
+              </a:rPr>
+              <a:t/>
+            </a:r>
+          </a:p>
+          <a:p>
+            <a:r>
+              <a:rPr sz="1600">
+                <a:solidFill>
+                  <a:srgbClr val="D4D4D4"/>
+                </a:solidFill>
+                <a:latin typeface="Courier New"/>
+              </a:rPr>
+              <a:t># macOS:</a:t>
+            </a:r>
+          </a:p>
+          <a:p>
+            <a:r>
+              <a:rPr sz="1600">
+                <a:solidFill>
+                  <a:srgbClr val="D4D4D4"/>
+                </a:solidFill>
+                <a:latin typeface="Courier New"/>
+              </a:rPr>
+              <a:t>brew install git</a:t>
+            </a:r>
+          </a:p>
+        </p:txBody>
+      </p:sp>
+      <p:sp>
+        <p:nvSpPr>
+          <p:cNvPr id="10" name="TextBox 9"/>
+          <p:cNvSpPr txBox="1"/>
+          <p:nvPr/>
+        </p:nvSpPr>
+        <p:spPr>
+          <a:xfrm>
+            <a:off x="548640" y="5554840"/>
+            <a:ext cx="11091672" cy="300000"/>
+          </a:xfrm>
+          <a:prstGeom prst="rect">
+            <a:avLst/>
+          </a:prstGeom>
+          <a:noFill/>
+        </p:spPr>
+        <p:txBody>
+          <a:bodyPr wrap="square">
+            <a:spAutoFit/>
+          </a:bodyPr>
+          <a:lstStyle/>
           <a:p>
             <a:pPr>
               <a:spcBef>
@@ -4981,9 +6478,123 @@
               </a:spcBef>
             </a:pPr>
             <a:r>
+              <a:t/>
+            </a:r>
+          </a:p>
+        </p:txBody>
+      </p:sp>
+      <p:sp>
+        <p:nvSpPr>
+          <p:cNvPr id="11" name="Rectangle 10"/>
+          <p:cNvSpPr/>
+          <p:nvPr/>
+        </p:nvSpPr>
+        <p:spPr>
+          <a:xfrm>
+            <a:off x="548640" y="5654840"/>
+            <a:ext cx="73152" cy="502880"/>
+          </a:xfrm>
+          <a:prstGeom prst="rect">
+            <a:avLst/>
+          </a:prstGeom>
+          <a:solidFill>
+            <a:srgbClr val="0F3460"/>
+          </a:solidFill>
+          <a:ln>
+            <a:noFill/>
+          </a:ln>
+        </p:spPr>
+        <p:style>
+          <a:lnRef idx="1">
+            <a:schemeClr val="accent1"/>
+          </a:lnRef>
+          <a:fillRef idx="3">
+            <a:schemeClr val="accent1"/>
+          </a:fillRef>
+          <a:effectRef idx="2">
+            <a:schemeClr val="accent1"/>
+          </a:effectRef>
+          <a:fontRef idx="minor">
+            <a:schemeClr val="lt1"/>
+          </a:fontRef>
+        </p:style>
+        <p:txBody>
+          <a:bodyPr rtlCol="0" anchor="ctr"/>
+          <a:lstStyle/>
+          <a:p>
+            <a:pPr algn="ctr"/>
+          </a:p>
+        </p:txBody>
+      </p:sp>
+      <p:sp>
+        <p:nvSpPr>
+          <p:cNvPr id="12" name="Rectangle 11"/>
+          <p:cNvSpPr/>
+          <p:nvPr/>
+        </p:nvSpPr>
+        <p:spPr>
+          <a:xfrm>
+            <a:off x="621792" y="5654840"/>
+            <a:ext cx="11018520" cy="502880"/>
+          </a:xfrm>
+          <a:prstGeom prst="rect">
+            <a:avLst/>
+          </a:prstGeom>
+          <a:solidFill>
+            <a:srgbClr val="E8F0FE"/>
+          </a:solidFill>
+          <a:ln>
+            <a:noFill/>
+          </a:ln>
+        </p:spPr>
+        <p:style>
+          <a:lnRef idx="1">
+            <a:schemeClr val="accent1"/>
+          </a:lnRef>
+          <a:fillRef idx="3">
+            <a:schemeClr val="accent1"/>
+          </a:fillRef>
+          <a:effectRef idx="2">
+            <a:schemeClr val="accent1"/>
+          </a:effectRef>
+          <a:fontRef idx="minor">
+            <a:schemeClr val="lt1"/>
+          </a:fontRef>
+        </p:style>
+        <p:txBody>
+          <a:bodyPr rtlCol="0" anchor="ctr"/>
+          <a:lstStyle/>
+          <a:p>
+            <a:pPr algn="ctr"/>
+          </a:p>
+        </p:txBody>
+      </p:sp>
+      <p:sp>
+        <p:nvSpPr>
+          <p:cNvPr id="13" name="TextBox 12"/>
+          <p:cNvSpPr txBox="1"/>
+          <p:nvPr/>
+        </p:nvSpPr>
+        <p:spPr>
+          <a:xfrm>
+            <a:off x="777240" y="5746280"/>
+            <a:ext cx="10771632" cy="411440"/>
+          </a:xfrm>
+          <a:prstGeom prst="rect">
+            <a:avLst/>
+          </a:prstGeom>
+          <a:noFill/>
+        </p:spPr>
+        <p:txBody>
+          <a:bodyPr wrap="square">
+            <a:spAutoFit/>
+          </a:bodyPr>
+          <a:lstStyle/>
+          <a:p>
+            <a:r>
               <a:rPr sz="2000" i="1">
                 <a:solidFill>
-                  <a:srgbClr val="555555"/>
+                  <a:srgbClr val="16213E"/>
                 </a:solidFill>
               </a:rPr>
               <a:t>Git is required to clone the course repository and switch between branches.</a:t>
@@ -5011,47 +6622,14 @@
       <p:grpSpPr/>
       <p:sp>
         <p:nvSpPr>
-          <p:cNvPr id="2" name="TextBox 1"/>
-          <p:cNvSpPr txBox="1"/>
-          <p:nvPr/>
-        </p:nvSpPr>
-        <p:spPr>
-          <a:xfrm>
-            <a:off x="365760" y="182880"/>
-            <a:ext cx="11430000" cy="731520"/>
-          </a:xfrm>
-          <a:prstGeom prst="rect">
-            <a:avLst/>
-          </a:prstGeom>
-          <a:noFill/>
-        </p:spPr>
-        <p:txBody>
-          <a:bodyPr wrap="none">
-            <a:spAutoFit/>
-          </a:bodyPr>
-          <a:lstStyle/>
-          <a:p>
-            <a:r>
-              <a:rPr sz="3200" b="1">
-                <a:solidFill>
-                  <a:srgbClr val="0F3460"/>
-                </a:solidFill>
-              </a:rPr>
-              <a:t>IDE Selection</a:t>
-            </a:r>
-          </a:p>
-        </p:txBody>
-      </p:sp>
-      <p:sp>
-        <p:nvSpPr>
-          <p:cNvPr id="3" name="Rectangle 2"/>
+          <p:cNvPr id="2" name="Rectangle 1"/>
           <p:cNvSpPr/>
           <p:nvPr/>
         </p:nvSpPr>
         <p:spPr>
           <a:xfrm>
-            <a:off x="365760" y="914400"/>
-            <a:ext cx="11430000" cy="36000"/>
+            <a:off x="0" y="0"/>
+            <a:ext cx="12188952" cy="1188720"/>
           </a:xfrm>
           <a:prstGeom prst="rect">
             <a:avLst/>
@@ -5087,14 +6665,14 @@
       </p:sp>
       <p:sp>
         <p:nvSpPr>
-          <p:cNvPr id="4" name="TextBox 3"/>
+          <p:cNvPr id="3" name="TextBox 2"/>
           <p:cNvSpPr txBox="1"/>
           <p:nvPr/>
         </p:nvSpPr>
         <p:spPr>
           <a:xfrm>
-            <a:off x="365760" y="1051560"/>
-            <a:ext cx="11430000" cy="5577840"/>
+            <a:off x="548640" y="182880"/>
+            <a:ext cx="11091672" cy="822960"/>
           </a:xfrm>
           <a:prstGeom prst="rect">
             <a:avLst/>
@@ -5107,8 +6685,51 @@
           </a:bodyPr>
           <a:lstStyle/>
           <a:p>
+            <a:r>
+              <a:rPr b="1" sz="3200">
+                <a:solidFill>
+                  <a:srgbClr val="FFFFFF"/>
+                </a:solidFill>
+              </a:rPr>
+              <a:t>IDE Selection</a:t>
+            </a:r>
+          </a:p>
+        </p:txBody>
+      </p:sp>
+      <p:sp>
+        <p:nvSpPr>
+          <p:cNvPr id="4" name="TextBox 3"/>
+          <p:cNvSpPr txBox="1"/>
+          <p:nvPr/>
+        </p:nvSpPr>
+        <p:spPr>
+          <a:xfrm>
+            <a:off x="548640" y="1325880"/>
+            <a:ext cx="11091672" cy="2880000"/>
+          </a:xfrm>
+          <a:prstGeom prst="rect">
+            <a:avLst/>
+          </a:prstGeom>
+          <a:noFill/>
+        </p:spPr>
+        <p:txBody>
+          <a:bodyPr wrap="square">
+            <a:spAutoFit/>
+          </a:bodyPr>
+          <a:lstStyle/>
+          <a:p>
             <a:pPr>
               <a:spcBef>
+                <a:spcPts val="400"/>
+              </a:spcBef>
+            </a:pPr>
+            <a:r>
+              <a:t/>
+            </a:r>
+          </a:p>
+          <a:p>
+            <a:pPr>
+              <a:spcBef>
                 <a:spcPts val="800"/>
               </a:spcBef>
             </a:pPr>
@@ -5124,10 +6745,89 @@
           <a:p>
             <a:pPr>
               <a:spcBef>
+                <a:spcPts val="400"/>
+              </a:spcBef>
+            </a:pPr>
+            <a:r>
+              <a:t/>
+            </a:r>
+          </a:p>
+          <a:p>
+            <a:pPr>
+              <a:spcBef>
+                <a:spcPts val="300"/>
+              </a:spcBef>
+            </a:pPr>
+            <a:r>
+              <a:rPr sz="2200">
+                <a:solidFill>
+                  <a:srgbClr val="111111"/>
+                </a:solidFill>
+              </a:rPr>
+              <a:t>• </a:t>
+            </a:r>
+            <a:r>
+              <a:rPr b="1" sz="2200">
+                <a:solidFill>
+                  <a:srgbClr val="111111"/>
+                </a:solidFill>
+              </a:rPr>
+              <a:t>IntelliJ IDEA</a:t>
+            </a:r>
+            <a:r>
+              <a:rPr sz="2200">
+                <a:solidFill>
+                  <a:srgbClr val="111111"/>
+                </a:solidFill>
+              </a:rPr>
+              <a:t> </a:t>
+            </a:r>
+            <a:r>
+              <a:rPr i="1" sz="2000">
+                <a:solidFill>
+                  <a:srgbClr val="666666"/>
+                </a:solidFill>
+              </a:rPr>
+              <a:t>(recommended for Kotlin/Java)</a:t>
+            </a:r>
+          </a:p>
+          <a:p>
+            <a:pPr>
+              <a:spcBef>
                 <a:spcPts val="200"/>
               </a:spcBef>
             </a:pPr>
             <a:r>
+              <a:rPr sz="2000">
+                <a:solidFill>
+                  <a:srgbClr val="111111"/>
+                </a:solidFill>
+              </a:rPr>
+              <a:t>    ◦ Community Edition — free, sufficient for this course</a:t>
+            </a:r>
+          </a:p>
+          <a:p>
+            <a:pPr>
+              <a:spcBef>
+                <a:spcPts val="200"/>
+              </a:spcBef>
+            </a:pPr>
+            <a:r>
+              <a:rPr sz="2000">
+                <a:solidFill>
+                  <a:srgbClr val="111111"/>
+                </a:solidFill>
+              </a:rPr>
+              <a:t>    ◦ Ultimate Edition — paid, extra framework support</a:t>
+            </a:r>
+          </a:p>
+          <a:p>
+            <a:pPr>
+              <a:spcBef>
+                <a:spcPts val="300"/>
+              </a:spcBef>
+            </a:pPr>
+            <a:r>
               <a:rPr sz="2200">
                 <a:solidFill>
                   <a:srgbClr val="111111"/>
@@ -5141,7 +6841,7 @@
                   <a:srgbClr val="111111"/>
                 </a:solidFill>
               </a:rPr>
-              <a:t>IntelliJ IDEA</a:t>
+              <a:t>Eclipse</a:t>
             </a:r>
             <a:r>
               <a:rPr sz="2200">
@@ -5149,33 +6849,44 @@
                   <a:srgbClr val="111111"/>
                 </a:solidFill>
               </a:rPr>
-              <a:t> *(recommended for Kotlin/Java)*</a:t>
-            </a:r>
-          </a:p>
-          <a:p>
+              <a:t> — free, good Java support</a:t>
+            </a:r>
+          </a:p>
+          <a:p>
+            <a:pPr>
+              <a:spcBef>
+                <a:spcPts val="300"/>
+              </a:spcBef>
+            </a:pPr>
             <a:r>
               <a:rPr sz="2200">
                 <a:solidFill>
                   <a:srgbClr val="111111"/>
                 </a:solidFill>
               </a:rPr>
-              <a:t>- Community Edition — free, sufficient for this course</a:t>
-            </a:r>
-          </a:p>
-          <a:p>
+              <a:t>• </a:t>
+            </a:r>
+            <a:r>
+              <a:rPr b="1" sz="2200">
+                <a:solidFill>
+                  <a:srgbClr val="111111"/>
+                </a:solidFill>
+              </a:rPr>
+              <a:t>Visual Studio Code</a:t>
+            </a:r>
             <a:r>
               <a:rPr sz="2200">
                 <a:solidFill>
                   <a:srgbClr val="111111"/>
                 </a:solidFill>
               </a:rPr>
-              <a:t>- Ultimate Edition — paid, extra framework support</a:t>
+              <a:t> — free, lightweight, multi-language</a:t>
             </a:r>
           </a:p>
           <a:p>
             <a:pPr>
               <a:spcBef>
-                <a:spcPts val="200"/>
+                <a:spcPts val="300"/>
               </a:spcBef>
             </a:pPr>
             <a:r>
@@ -5192,7 +6903,7 @@
                   <a:srgbClr val="111111"/>
                 </a:solidFill>
               </a:rPr>
-              <a:t>Eclipse</a:t>
+              <a:t>WebStorm / PyCharm</a:t>
             </a:r>
             <a:r>
               <a:rPr sz="2200">
@@ -5200,106 +6911,272 @@
                   <a:srgbClr val="111111"/>
                 </a:solidFill>
               </a:rPr>
-              <a:t> — free, good Java support</a:t>
+              <a:t> — JetBrains IDEs for JS / Python</a:t>
             </a:r>
           </a:p>
           <a:p>
             <a:pPr>
               <a:spcBef>
-                <a:spcPts val="200"/>
-              </a:spcBef>
-            </a:pPr>
-            <a:r>
-              <a:rPr sz="2200">
-                <a:solidFill>
-                  <a:srgbClr val="111111"/>
-                </a:solidFill>
-              </a:rPr>
-              <a:t>• </a:t>
-            </a:r>
-            <a:r>
-              <a:rPr b="1" sz="2200">
-                <a:solidFill>
-                  <a:srgbClr val="111111"/>
-                </a:solidFill>
-              </a:rPr>
-              <a:t>Visual Studio Code</a:t>
-            </a:r>
-            <a:r>
-              <a:rPr sz="2200">
-                <a:solidFill>
-                  <a:srgbClr val="111111"/>
-                </a:solidFill>
-              </a:rPr>
-              <a:t> — free, lightweight, multi-language</a:t>
+                <a:spcPts val="400"/>
+              </a:spcBef>
+            </a:pPr>
+            <a:r>
+              <a:t/>
             </a:r>
           </a:p>
           <a:p>
             <a:pPr>
               <a:spcBef>
-                <a:spcPts val="200"/>
-              </a:spcBef>
-            </a:pPr>
-            <a:r>
-              <a:rPr sz="2200">
-                <a:solidFill>
-                  <a:srgbClr val="111111"/>
-                </a:solidFill>
-              </a:rPr>
-              <a:t>• </a:t>
-            </a:r>
-            <a:r>
-              <a:rPr b="1" sz="2200">
-                <a:solidFill>
-                  <a:srgbClr val="111111"/>
-                </a:solidFill>
-              </a:rPr>
-              <a:t>WebStorm / PyCharm</a:t>
-            </a:r>
-            <a:r>
-              <a:rPr sz="2200">
-                <a:solidFill>
-                  <a:srgbClr val="111111"/>
-                </a:solidFill>
-              </a:rPr>
-              <a:t> — JetBrains IDEs for JS / Python</a:t>
+                <a:spcPts val="1000"/>
+              </a:spcBef>
+            </a:pPr>
+            <a:r>
+              <a:t/>
             </a:r>
           </a:p>
           <a:p>
             <a:pPr>
               <a:spcBef>
-                <a:spcPts val="800"/>
+                <a:spcPts val="400"/>
               </a:spcBef>
             </a:pPr>
             <a:r>
               <a:t/>
             </a:r>
           </a:p>
-          <a:p>
-            <a:pPr>
-              <a:spcBef>
-                <a:spcPts val="400"/>
-              </a:spcBef>
-            </a:pPr>
+        </p:txBody>
+      </p:sp>
+      <p:sp>
+        <p:nvSpPr>
+          <p:cNvPr id="5" name="Rectangle 4"/>
+          <p:cNvSpPr/>
+          <p:nvPr/>
+        </p:nvSpPr>
+        <p:spPr>
+          <a:xfrm>
+            <a:off x="548640" y="4205880"/>
+            <a:ext cx="73152" cy="502880"/>
+          </a:xfrm>
+          <a:prstGeom prst="rect">
+            <a:avLst/>
+          </a:prstGeom>
+          <a:solidFill>
+            <a:srgbClr val="0F3460"/>
+          </a:solidFill>
+          <a:ln>
+            <a:noFill/>
+          </a:ln>
+        </p:spPr>
+        <p:style>
+          <a:lnRef idx="1">
+            <a:schemeClr val="accent1"/>
+          </a:lnRef>
+          <a:fillRef idx="3">
+            <a:schemeClr val="accent1"/>
+          </a:fillRef>
+          <a:effectRef idx="2">
+            <a:schemeClr val="accent1"/>
+          </a:effectRef>
+          <a:fontRef idx="minor">
+            <a:schemeClr val="lt1"/>
+          </a:fontRef>
+        </p:style>
+        <p:txBody>
+          <a:bodyPr rtlCol="0" anchor="ctr"/>
+          <a:lstStyle/>
+          <a:p>
+            <a:pPr algn="ctr"/>
+          </a:p>
+        </p:txBody>
+      </p:sp>
+      <p:sp>
+        <p:nvSpPr>
+          <p:cNvPr id="6" name="Rectangle 5"/>
+          <p:cNvSpPr/>
+          <p:nvPr/>
+        </p:nvSpPr>
+        <p:spPr>
+          <a:xfrm>
+            <a:off x="621792" y="4205880"/>
+            <a:ext cx="11018520" cy="502880"/>
+          </a:xfrm>
+          <a:prstGeom prst="rect">
+            <a:avLst/>
+          </a:prstGeom>
+          <a:solidFill>
+            <a:srgbClr val="E8F0FE"/>
+          </a:solidFill>
+          <a:ln>
+            <a:noFill/>
+          </a:ln>
+        </p:spPr>
+        <p:style>
+          <a:lnRef idx="1">
+            <a:schemeClr val="accent1"/>
+          </a:lnRef>
+          <a:fillRef idx="3">
+            <a:schemeClr val="accent1"/>
+          </a:fillRef>
+          <a:effectRef idx="2">
+            <a:schemeClr val="accent1"/>
+          </a:effectRef>
+          <a:fontRef idx="minor">
+            <a:schemeClr val="lt1"/>
+          </a:fontRef>
+        </p:style>
+        <p:txBody>
+          <a:bodyPr rtlCol="0" anchor="ctr"/>
+          <a:lstStyle/>
+          <a:p>
+            <a:pPr algn="ctr"/>
+          </a:p>
+        </p:txBody>
+      </p:sp>
+      <p:sp>
+        <p:nvSpPr>
+          <p:cNvPr id="7" name="TextBox 6"/>
+          <p:cNvSpPr txBox="1"/>
+          <p:nvPr/>
+        </p:nvSpPr>
+        <p:spPr>
+          <a:xfrm>
+            <a:off x="777240" y="4297320"/>
+            <a:ext cx="10771632" cy="411440"/>
+          </a:xfrm>
+          <a:prstGeom prst="rect">
+            <a:avLst/>
+          </a:prstGeom>
+          <a:noFill/>
+        </p:spPr>
+        <p:txBody>
+          <a:bodyPr wrap="square">
+            <a:spAutoFit/>
+          </a:bodyPr>
+          <a:lstStyle/>
+          <a:p>
             <a:r>
               <a:rPr sz="2000" i="1">
                 <a:solidFill>
-                  <a:srgbClr val="555555"/>
+                  <a:srgbClr val="16213E"/>
                 </a:solidFill>
               </a:rPr>
               <a:t>IntelliJ IDEA Community Edition is used in all video demos.</a:t>
             </a:r>
           </a:p>
-          <a:p>
-            <a:pPr>
-              <a:spcBef>
-                <a:spcPts val="400"/>
-              </a:spcBef>
-            </a:pPr>
+        </p:txBody>
+      </p:sp>
+      <p:sp>
+        <p:nvSpPr>
+          <p:cNvPr id="8" name="Rectangle 7"/>
+          <p:cNvSpPr/>
+          <p:nvPr/>
+        </p:nvSpPr>
+        <p:spPr>
+          <a:xfrm>
+            <a:off x="548640" y="4800200"/>
+            <a:ext cx="73152" cy="502880"/>
+          </a:xfrm>
+          <a:prstGeom prst="rect">
+            <a:avLst/>
+          </a:prstGeom>
+          <a:solidFill>
+            <a:srgbClr val="0F3460"/>
+          </a:solidFill>
+          <a:ln>
+            <a:noFill/>
+          </a:ln>
+        </p:spPr>
+        <p:style>
+          <a:lnRef idx="1">
+            <a:schemeClr val="accent1"/>
+          </a:lnRef>
+          <a:fillRef idx="3">
+            <a:schemeClr val="accent1"/>
+          </a:fillRef>
+          <a:effectRef idx="2">
+            <a:schemeClr val="accent1"/>
+          </a:effectRef>
+          <a:fontRef idx="minor">
+            <a:schemeClr val="lt1"/>
+          </a:fontRef>
+        </p:style>
+        <p:txBody>
+          <a:bodyPr rtlCol="0" anchor="ctr"/>
+          <a:lstStyle/>
+          <a:p>
+            <a:pPr algn="ctr"/>
+          </a:p>
+        </p:txBody>
+      </p:sp>
+      <p:sp>
+        <p:nvSpPr>
+          <p:cNvPr id="9" name="Rectangle 8"/>
+          <p:cNvSpPr/>
+          <p:nvPr/>
+        </p:nvSpPr>
+        <p:spPr>
+          <a:xfrm>
+            <a:off x="621792" y="4800200"/>
+            <a:ext cx="11018520" cy="502880"/>
+          </a:xfrm>
+          <a:prstGeom prst="rect">
+            <a:avLst/>
+          </a:prstGeom>
+          <a:solidFill>
+            <a:srgbClr val="E8F0FE"/>
+          </a:solidFill>
+          <a:ln>
+            <a:noFill/>
+          </a:ln>
+        </p:spPr>
+        <p:style>
+          <a:lnRef idx="1">
+            <a:schemeClr val="accent1"/>
+          </a:lnRef>
+          <a:fillRef idx="3">
+            <a:schemeClr val="accent1"/>
+          </a:fillRef>
+          <a:effectRef idx="2">
+            <a:schemeClr val="accent1"/>
+          </a:effectRef>
+          <a:fontRef idx="minor">
+            <a:schemeClr val="lt1"/>
+          </a:fontRef>
+        </p:style>
+        <p:txBody>
+          <a:bodyPr rtlCol="0" anchor="ctr"/>
+          <a:lstStyle/>
+          <a:p>
+            <a:pPr algn="ctr"/>
+          </a:p>
+        </p:txBody>
+      </p:sp>
+      <p:sp>
+        <p:nvSpPr>
+          <p:cNvPr id="10" name="TextBox 9"/>
+          <p:cNvSpPr txBox="1"/>
+          <p:nvPr/>
+        </p:nvSpPr>
+        <p:spPr>
+          <a:xfrm>
+            <a:off x="777240" y="4891640"/>
+            <a:ext cx="10771632" cy="411440"/>
+          </a:xfrm>
+          <a:prstGeom prst="rect">
+            <a:avLst/>
+          </a:prstGeom>
+          <a:noFill/>
+        </p:spPr>
+        <p:txBody>
+          <a:bodyPr wrap="square">
+            <a:spAutoFit/>
+          </a:bodyPr>
+          <a:lstStyle/>
+          <a:p>
             <a:r>
               <a:rPr sz="2000" i="1">
                 <a:solidFill>
-                  <a:srgbClr val="555555"/>
+                  <a:srgbClr val="16213E"/>
                 </a:solidFill>
               </a:rPr>
               <a:t>Gradle and Git plugins are </a:t>
@@ -5307,7 +7184,7 @@
             <a:r>
               <a:rPr b="1" sz="2000" i="1">
                 <a:solidFill>
-                  <a:srgbClr val="555555"/>
+                  <a:srgbClr val="16213E"/>
                 </a:solidFill>
               </a:rPr>
               <a:t>built-in</a:t>
@@ -5315,7 +7192,7 @@
             <a:r>
               <a:rPr sz="2000" i="1">
                 <a:solidFill>
-                  <a:srgbClr val="555555"/>
+                  <a:srgbClr val="16213E"/>
                 </a:solidFill>
               </a:rPr>
               <a:t> — no extra configuration needed.</a:t>
@@ -5343,47 +7220,14 @@
       <p:grpSpPr/>
       <p:sp>
         <p:nvSpPr>
-          <p:cNvPr id="2" name="TextBox 1"/>
-          <p:cNvSpPr txBox="1"/>
-          <p:nvPr/>
-        </p:nvSpPr>
-        <p:spPr>
-          <a:xfrm>
-            <a:off x="365760" y="182880"/>
-            <a:ext cx="11430000" cy="731520"/>
-          </a:xfrm>
-          <a:prstGeom prst="rect">
-            <a:avLst/>
-          </a:prstGeom>
-          <a:noFill/>
-        </p:spPr>
-        <p:txBody>
-          <a:bodyPr wrap="none">
-            <a:spAutoFit/>
-          </a:bodyPr>
-          <a:lstStyle/>
-          <a:p>
-            <a:r>
-              <a:rPr sz="3200" b="1">
-                <a:solidFill>
-                  <a:srgbClr val="0F3460"/>
-                </a:solidFill>
-              </a:rPr>
-              <a:t>Required Tools — Checklist</a:t>
-            </a:r>
-          </a:p>
-        </p:txBody>
-      </p:sp>
-      <p:sp>
-        <p:nvSpPr>
-          <p:cNvPr id="3" name="Rectangle 2"/>
+          <p:cNvPr id="2" name="Rectangle 1"/>
           <p:cNvSpPr/>
           <p:nvPr/>
         </p:nvSpPr>
         <p:spPr>
           <a:xfrm>
-            <a:off x="365760" y="914400"/>
-            <a:ext cx="11430000" cy="36000"/>
+            <a:off x="0" y="0"/>
+            <a:ext cx="12188952" cy="1188720"/>
           </a:xfrm>
           <a:prstGeom prst="rect">
             <a:avLst/>
@@ -5419,14 +7263,14 @@
       </p:sp>
       <p:sp>
         <p:nvSpPr>
-          <p:cNvPr id="4" name="TextBox 3"/>
+          <p:cNvPr id="3" name="TextBox 2"/>
           <p:cNvSpPr txBox="1"/>
           <p:nvPr/>
         </p:nvSpPr>
         <p:spPr>
           <a:xfrm>
-            <a:off x="365760" y="1051560"/>
-            <a:ext cx="11430000" cy="5577840"/>
+            <a:off x="548640" y="182880"/>
+            <a:ext cx="11091672" cy="822960"/>
           </a:xfrm>
           <a:prstGeom prst="rect">
             <a:avLst/>
@@ -5439,8 +7283,51 @@
           </a:bodyPr>
           <a:lstStyle/>
           <a:p>
+            <a:r>
+              <a:rPr b="1" sz="3200">
+                <a:solidFill>
+                  <a:srgbClr val="FFFFFF"/>
+                </a:solidFill>
+              </a:rPr>
+              <a:t>Required Tools — Checklist</a:t>
+            </a:r>
+          </a:p>
+        </p:txBody>
+      </p:sp>
+      <p:sp>
+        <p:nvSpPr>
+          <p:cNvPr id="4" name="TextBox 3"/>
+          <p:cNvSpPr txBox="1"/>
+          <p:nvPr/>
+        </p:nvSpPr>
+        <p:spPr>
+          <a:xfrm>
+            <a:off x="548640" y="1325880"/>
+            <a:ext cx="11091672" cy="560000"/>
+          </a:xfrm>
+          <a:prstGeom prst="rect">
+            <a:avLst/>
+          </a:prstGeom>
+          <a:noFill/>
+        </p:spPr>
+        <p:txBody>
+          <a:bodyPr wrap="square">
+            <a:spAutoFit/>
+          </a:bodyPr>
+          <a:lstStyle/>
+          <a:p>
             <a:pPr>
               <a:spcBef>
+                <a:spcPts val="400"/>
+              </a:spcBef>
+            </a:pPr>
+            <a:r>
+              <a:t/>
+            </a:r>
+          </a:p>
+          <a:p>
+            <a:pPr>
+              <a:spcBef>
                 <a:spcPts val="800"/>
               </a:spcBef>
             </a:pPr>
@@ -5456,12 +7343,80 @@
           <a:p>
             <a:pPr>
               <a:spcBef>
-                <a:spcPts val="600"/>
-              </a:spcBef>
-              <a:spcAft>
-                <a:spcPts val="600"/>
-              </a:spcAft>
-            </a:pPr>
+                <a:spcPts val="400"/>
+              </a:spcBef>
+            </a:pPr>
+            <a:r>
+              <a:t/>
+            </a:r>
+          </a:p>
+        </p:txBody>
+      </p:sp>
+      <p:sp>
+        <p:nvSpPr>
+          <p:cNvPr id="5" name="Rectangle 4"/>
+          <p:cNvSpPr/>
+          <p:nvPr/>
+        </p:nvSpPr>
+        <p:spPr>
+          <a:xfrm>
+            <a:off x="548640" y="1885880"/>
+            <a:ext cx="11091672" cy="1463040"/>
+          </a:xfrm>
+          <a:prstGeom prst="rect">
+            <a:avLst/>
+          </a:prstGeom>
+          <a:solidFill>
+            <a:srgbClr val="1E1E1E"/>
+          </a:solidFill>
+          <a:ln>
+            <a:noFill/>
+          </a:ln>
+        </p:spPr>
+        <p:style>
+          <a:lnRef idx="1">
+            <a:schemeClr val="accent1"/>
+          </a:lnRef>
+          <a:fillRef idx="3">
+            <a:schemeClr val="accent1"/>
+          </a:fillRef>
+          <a:effectRef idx="2">
+            <a:schemeClr val="accent1"/>
+          </a:effectRef>
+          <a:fontRef idx="minor">
+            <a:schemeClr val="lt1"/>
+          </a:fontRef>
+        </p:style>
+        <p:txBody>
+          <a:bodyPr rtlCol="0" anchor="ctr"/>
+          <a:lstStyle/>
+          <a:p>
+            <a:pPr algn="ctr"/>
+          </a:p>
+        </p:txBody>
+      </p:sp>
+      <p:sp>
+        <p:nvSpPr>
+          <p:cNvPr id="6" name="TextBox 5"/>
+          <p:cNvSpPr txBox="1"/>
+          <p:nvPr/>
+        </p:nvSpPr>
+        <p:spPr>
+          <a:xfrm>
+            <a:off x="731520" y="2023040"/>
+            <a:ext cx="10908792" cy="1188720"/>
+          </a:xfrm>
+          <a:prstGeom prst="rect">
+            <a:avLst/>
+          </a:prstGeom>
+          <a:noFill/>
+        </p:spPr>
+        <p:txBody>
+          <a:bodyPr wrap="square">
+            <a:spAutoFit/>
+          </a:bodyPr>
+          <a:lstStyle/>
+          <a:p>
             <a:r>
               <a:rPr sz="1600">
                 <a:solidFill>
@@ -5469,86 +7424,394 @@
                 </a:solidFill>
                 <a:latin typeface="Courier New"/>
               </a:rPr>
-              <a:t>✓  Docker Desktop  — running &amp; signed in
-✓  Git             — installed &amp; configured
-✓  IDE             — installed with Gradle support
-✓  Docker Hub      — account created
-✓  GitHub          — account created</a:t>
-            </a:r>
-          </a:p>
+              <a:t>✓  Docker Desktop  — running &amp; signed in</a:t>
+            </a:r>
+          </a:p>
+          <a:p>
+            <a:r>
+              <a:rPr sz="1600">
+                <a:solidFill>
+                  <a:srgbClr val="D4D4D4"/>
+                </a:solidFill>
+                <a:latin typeface="Courier New"/>
+              </a:rPr>
+              <a:t>✓  Git             — installed &amp; configured</a:t>
+            </a:r>
+          </a:p>
+          <a:p>
+            <a:r>
+              <a:rPr sz="1600">
+                <a:solidFill>
+                  <a:srgbClr val="D4D4D4"/>
+                </a:solidFill>
+                <a:latin typeface="Courier New"/>
+              </a:rPr>
+              <a:t>✓  IDE             — installed with Gradle support</a:t>
+            </a:r>
+          </a:p>
+          <a:p>
+            <a:r>
+              <a:rPr sz="1600">
+                <a:solidFill>
+                  <a:srgbClr val="D4D4D4"/>
+                </a:solidFill>
+                <a:latin typeface="Courier New"/>
+              </a:rPr>
+              <a:t>✓  Docker Hub      — account created</a:t>
+            </a:r>
+          </a:p>
+          <a:p>
+            <a:r>
+              <a:rPr sz="1600">
+                <a:solidFill>
+                  <a:srgbClr val="D4D4D4"/>
+                </a:solidFill>
+                <a:latin typeface="Courier New"/>
+              </a:rPr>
+              <a:t>✓  GitHub          — account created</a:t>
+            </a:r>
+          </a:p>
+        </p:txBody>
+      </p:sp>
+      <p:sp>
+        <p:nvSpPr>
+          <p:cNvPr id="7" name="TextBox 6"/>
+          <p:cNvSpPr txBox="1"/>
+          <p:nvPr/>
+        </p:nvSpPr>
+        <p:spPr>
+          <a:xfrm>
+            <a:off x="548640" y="3440360"/>
+            <a:ext cx="11091672" cy="860000"/>
+          </a:xfrm>
+          <a:prstGeom prst="rect">
+            <a:avLst/>
+          </a:prstGeom>
+          <a:noFill/>
+        </p:spPr>
+        <p:txBody>
+          <a:bodyPr wrap="square">
+            <a:spAutoFit/>
+          </a:bodyPr>
+          <a:lstStyle/>
           <a:p>
             <a:pPr>
               <a:spcBef>
+                <a:spcPts val="400"/>
+              </a:spcBef>
+            </a:pPr>
+            <a:r>
+              <a:t/>
+            </a:r>
+          </a:p>
+          <a:p>
+            <a:pPr>
+              <a:spcBef>
+                <a:spcPts val="1000"/>
+              </a:spcBef>
+            </a:pPr>
+            <a:r>
+              <a:t/>
+            </a:r>
+          </a:p>
+          <a:p>
+            <a:pPr>
+              <a:spcBef>
+                <a:spcPts val="400"/>
+              </a:spcBef>
+            </a:pPr>
+            <a:r>
+              <a:t/>
+            </a:r>
+          </a:p>
+          <a:p>
+            <a:pPr>
+              <a:spcBef>
                 <a:spcPts val="800"/>
               </a:spcBef>
             </a:pPr>
             <a:r>
+              <a:rPr b="1" sz="2400">
+                <a:solidFill>
+                  <a:srgbClr val="16213E"/>
+                </a:solidFill>
+              </a:rPr>
+              <a:t>Verify Docker is working:</a:t>
+            </a:r>
+          </a:p>
+          <a:p>
+            <a:pPr>
+              <a:spcBef>
+                <a:spcPts val="400"/>
+              </a:spcBef>
+            </a:pPr>
+            <a:r>
               <a:t/>
             </a:r>
           </a:p>
+        </p:txBody>
+      </p:sp>
+      <p:sp>
+        <p:nvSpPr>
+          <p:cNvPr id="8" name="Rectangle 7"/>
+          <p:cNvSpPr/>
+          <p:nvPr/>
+        </p:nvSpPr>
+        <p:spPr>
+          <a:xfrm>
+            <a:off x="548640" y="4300360"/>
+            <a:ext cx="11091672" cy="1005840"/>
+          </a:xfrm>
+          <a:prstGeom prst="rect">
+            <a:avLst/>
+          </a:prstGeom>
+          <a:solidFill>
+            <a:srgbClr val="1E1E1E"/>
+          </a:solidFill>
+          <a:ln>
+            <a:noFill/>
+          </a:ln>
+        </p:spPr>
+        <p:style>
+          <a:lnRef idx="1">
+            <a:schemeClr val="accent1"/>
+          </a:lnRef>
+          <a:fillRef idx="3">
+            <a:schemeClr val="accent1"/>
+          </a:fillRef>
+          <a:effectRef idx="2">
+            <a:schemeClr val="accent1"/>
+          </a:effectRef>
+          <a:fontRef idx="minor">
+            <a:schemeClr val="lt1"/>
+          </a:fontRef>
+        </p:style>
+        <p:txBody>
+          <a:bodyPr rtlCol="0" anchor="ctr"/>
+          <a:lstStyle/>
+          <a:p>
+            <a:pPr algn="ctr"/>
+          </a:p>
+        </p:txBody>
+      </p:sp>
+      <p:sp>
+        <p:nvSpPr>
+          <p:cNvPr id="9" name="TextBox 8"/>
+          <p:cNvSpPr txBox="1"/>
+          <p:nvPr/>
+        </p:nvSpPr>
+        <p:spPr>
+          <a:xfrm>
+            <a:off x="731520" y="4437520"/>
+            <a:ext cx="10908792" cy="731520"/>
+          </a:xfrm>
+          <a:prstGeom prst="rect">
+            <a:avLst/>
+          </a:prstGeom>
+          <a:noFill/>
+        </p:spPr>
+        <p:txBody>
+          <a:bodyPr wrap="square">
+            <a:spAutoFit/>
+          </a:bodyPr>
+          <a:lstStyle/>
+          <a:p>
+            <a:r>
+              <a:rPr sz="1600">
+                <a:solidFill>
+                  <a:srgbClr val="D4D4D4"/>
+                </a:solidFill>
+                <a:latin typeface="Courier New"/>
+              </a:rPr>
+              <a:t>docker --version</a:t>
+            </a:r>
+          </a:p>
+          <a:p>
+            <a:r>
+              <a:rPr sz="1600">
+                <a:solidFill>
+                  <a:srgbClr val="D4D4D4"/>
+                </a:solidFill>
+                <a:latin typeface="Courier New"/>
+              </a:rPr>
+              <a:t>docker compose version</a:t>
+            </a:r>
+          </a:p>
+          <a:p>
+            <a:r>
+              <a:rPr sz="1600">
+                <a:solidFill>
+                  <a:srgbClr val="D4D4D4"/>
+                </a:solidFill>
+                <a:latin typeface="Courier New"/>
+              </a:rPr>
+              <a:t>docker run hello-world</a:t>
+            </a:r>
+          </a:p>
+        </p:txBody>
+      </p:sp>
+      <p:sp>
+        <p:nvSpPr>
+          <p:cNvPr id="10" name="TextBox 9"/>
+          <p:cNvSpPr txBox="1"/>
+          <p:nvPr/>
+        </p:nvSpPr>
+        <p:spPr>
+          <a:xfrm>
+            <a:off x="548640" y="5397640"/>
+            <a:ext cx="11091672" cy="300000"/>
+          </a:xfrm>
+          <a:prstGeom prst="rect">
+            <a:avLst/>
+          </a:prstGeom>
+          <a:noFill/>
+        </p:spPr>
+        <p:txBody>
+          <a:bodyPr wrap="square">
+            <a:spAutoFit/>
+          </a:bodyPr>
+          <a:lstStyle/>
           <a:p>
             <a:pPr>
               <a:spcBef>
-                <a:spcPts val="800"/>
-              </a:spcBef>
-            </a:pPr>
-            <a:r>
-              <a:rPr b="1" sz="2400">
+                <a:spcPts val="400"/>
+              </a:spcBef>
+            </a:pPr>
+            <a:r>
+              <a:t/>
+            </a:r>
+          </a:p>
+        </p:txBody>
+      </p:sp>
+      <p:sp>
+        <p:nvSpPr>
+          <p:cNvPr id="11" name="Rectangle 10"/>
+          <p:cNvSpPr/>
+          <p:nvPr/>
+        </p:nvSpPr>
+        <p:spPr>
+          <a:xfrm>
+            <a:off x="548640" y="5497640"/>
+            <a:ext cx="73152" cy="502880"/>
+          </a:xfrm>
+          <a:prstGeom prst="rect">
+            <a:avLst/>
+          </a:prstGeom>
+          <a:solidFill>
+            <a:srgbClr val="0F3460"/>
+          </a:solidFill>
+          <a:ln>
+            <a:noFill/>
+          </a:ln>
+        </p:spPr>
+        <p:style>
+          <a:lnRef idx="1">
+            <a:schemeClr val="accent1"/>
+          </a:lnRef>
+          <a:fillRef idx="3">
+            <a:schemeClr val="accent1"/>
+          </a:fillRef>
+          <a:effectRef idx="2">
+            <a:schemeClr val="accent1"/>
+          </a:effectRef>
+          <a:fontRef idx="minor">
+            <a:schemeClr val="lt1"/>
+          </a:fontRef>
+        </p:style>
+        <p:txBody>
+          <a:bodyPr rtlCol="0" anchor="ctr"/>
+          <a:lstStyle/>
+          <a:p>
+            <a:pPr algn="ctr"/>
+          </a:p>
+        </p:txBody>
+      </p:sp>
+      <p:sp>
+        <p:nvSpPr>
+          <p:cNvPr id="12" name="Rectangle 11"/>
+          <p:cNvSpPr/>
+          <p:nvPr/>
+        </p:nvSpPr>
+        <p:spPr>
+          <a:xfrm>
+            <a:off x="621792" y="5497640"/>
+            <a:ext cx="11018520" cy="502880"/>
+          </a:xfrm>
+          <a:prstGeom prst="rect">
+            <a:avLst/>
+          </a:prstGeom>
+          <a:solidFill>
+            <a:srgbClr val="E8F0FE"/>
+          </a:solidFill>
+          <a:ln>
+            <a:noFill/>
+          </a:ln>
+        </p:spPr>
+        <p:style>
+          <a:lnRef idx="1">
+            <a:schemeClr val="accent1"/>
+          </a:lnRef>
+          <a:fillRef idx="3">
+            <a:schemeClr val="accent1"/>
+          </a:fillRef>
+          <a:effectRef idx="2">
+            <a:schemeClr val="accent1"/>
+          </a:effectRef>
+          <a:fontRef idx="minor">
+            <a:schemeClr val="lt1"/>
+          </a:fontRef>
+        </p:style>
+        <p:txBody>
+          <a:bodyPr rtlCol="0" anchor="ctr"/>
+          <a:lstStyle/>
+          <a:p>
+            <a:pPr algn="ctr"/>
+          </a:p>
+        </p:txBody>
+      </p:sp>
+      <p:sp>
+        <p:nvSpPr>
+          <p:cNvPr id="13" name="TextBox 12"/>
+          <p:cNvSpPr txBox="1"/>
+          <p:nvPr/>
+        </p:nvSpPr>
+        <p:spPr>
+          <a:xfrm>
+            <a:off x="777240" y="5589080"/>
+            <a:ext cx="10771632" cy="411440"/>
+          </a:xfrm>
+          <a:prstGeom prst="rect">
+            <a:avLst/>
+          </a:prstGeom>
+          <a:noFill/>
+        </p:spPr>
+        <p:txBody>
+          <a:bodyPr wrap="square">
+            <a:spAutoFit/>
+          </a:bodyPr>
+          <a:lstStyle/>
+          <a:p>
+            <a:r>
+              <a:rPr sz="2000" i="1">
                 <a:solidFill>
                   <a:srgbClr val="16213E"/>
                 </a:solidFill>
               </a:rPr>
-              <a:t>Verify Docker is working:</a:t>
-            </a:r>
-          </a:p>
-          <a:p>
-            <a:pPr>
-              <a:spcBef>
-                <a:spcPts val="600"/>
-              </a:spcBef>
-              <a:spcAft>
-                <a:spcPts val="600"/>
-              </a:spcAft>
-            </a:pPr>
-            <a:r>
-              <a:rPr sz="1600">
-                <a:solidFill>
-                  <a:srgbClr val="D4D4D4"/>
+              <a:t>If </a:t>
+            </a:r>
+            <a:r>
+              <a:rPr sz="2000" i="1">
+                <a:solidFill>
+                  <a:srgbClr val="16213E"/>
                 </a:solidFill>
                 <a:latin typeface="Courier New"/>
               </a:rPr>
-              <a:t>docker --version
-docker compose version
-docker run hello-world</a:t>
-            </a:r>
-          </a:p>
-          <a:p>
-            <a:pPr>
-              <a:spcBef>
-                <a:spcPts val="400"/>
-              </a:spcBef>
-            </a:pPr>
+              <a:t>hello-world</a:t>
+            </a:r>
             <a:r>
               <a:rPr sz="2000" i="1">
                 <a:solidFill>
-                  <a:srgbClr val="555555"/>
-                </a:solidFill>
-              </a:rPr>
-              <a:t>If </a:t>
-            </a:r>
-            <a:r>
-              <a:rPr sz="2000" i="1">
-                <a:solidFill>
-                  <a:srgbClr val="555555"/>
-                </a:solidFill>
-                <a:latin typeface="Courier New"/>
-              </a:rPr>
-              <a:t>hello-world</a:t>
-            </a:r>
-            <a:r>
-              <a:rPr sz="2000" i="1">
-                <a:solidFill>
-                  <a:srgbClr val="555555"/>
+                  <a:srgbClr val="16213E"/>
                 </a:solidFill>
               </a:rPr>
               <a:t> prints "Hello from Docker!" — you are ready to go.</a:t>
@@ -5576,47 +7839,14 @@
       <p:grpSpPr/>
       <p:sp>
         <p:nvSpPr>
-          <p:cNvPr id="2" name="TextBox 1"/>
-          <p:cNvSpPr txBox="1"/>
-          <p:nvPr/>
-        </p:nvSpPr>
-        <p:spPr>
-          <a:xfrm>
-            <a:off x="365760" y="182880"/>
-            <a:ext cx="11430000" cy="731520"/>
-          </a:xfrm>
-          <a:prstGeom prst="rect">
-            <a:avLst/>
-          </a:prstGeom>
-          <a:noFill/>
-        </p:spPr>
-        <p:txBody>
-          <a:bodyPr wrap="none">
-            <a:spAutoFit/>
-          </a:bodyPr>
-          <a:lstStyle/>
-          <a:p>
-            <a:r>
-              <a:rPr sz="3200" b="1">
-                <a:solidFill>
-                  <a:srgbClr val="0F3460"/>
-                </a:solidFill>
-              </a:rPr>
-              <a:t>Step-by-Step Setup</a:t>
-            </a:r>
-          </a:p>
-        </p:txBody>
-      </p:sp>
-      <p:sp>
-        <p:nvSpPr>
-          <p:cNvPr id="3" name="Rectangle 2"/>
+          <p:cNvPr id="2" name="Rectangle 1"/>
           <p:cNvSpPr/>
           <p:nvPr/>
         </p:nvSpPr>
         <p:spPr>
           <a:xfrm>
-            <a:off x="365760" y="914400"/>
-            <a:ext cx="11430000" cy="36000"/>
+            <a:off x="0" y="0"/>
+            <a:ext cx="12188952" cy="1188720"/>
           </a:xfrm>
           <a:prstGeom prst="rect">
             <a:avLst/>
@@ -5652,14 +7882,14 @@
       </p:sp>
       <p:sp>
         <p:nvSpPr>
-          <p:cNvPr id="4" name="TextBox 3"/>
+          <p:cNvPr id="3" name="TextBox 2"/>
           <p:cNvSpPr txBox="1"/>
           <p:nvPr/>
         </p:nvSpPr>
         <p:spPr>
           <a:xfrm>
-            <a:off x="365760" y="1051560"/>
-            <a:ext cx="11430000" cy="5577840"/>
+            <a:off x="548640" y="182880"/>
+            <a:ext cx="11091672" cy="822960"/>
           </a:xfrm>
           <a:prstGeom prst="rect">
             <a:avLst/>
@@ -5672,8 +7902,51 @@
           </a:bodyPr>
           <a:lstStyle/>
           <a:p>
+            <a:r>
+              <a:rPr b="1" sz="3200">
+                <a:solidFill>
+                  <a:srgbClr val="FFFFFF"/>
+                </a:solidFill>
+              </a:rPr>
+              <a:t>Step-by-Step Setup</a:t>
+            </a:r>
+          </a:p>
+        </p:txBody>
+      </p:sp>
+      <p:sp>
+        <p:nvSpPr>
+          <p:cNvPr id="4" name="TextBox 3"/>
+          <p:cNvSpPr txBox="1"/>
+          <p:nvPr/>
+        </p:nvSpPr>
+        <p:spPr>
+          <a:xfrm>
+            <a:off x="548640" y="1325880"/>
+            <a:ext cx="11091672" cy="2560000"/>
+          </a:xfrm>
+          <a:prstGeom prst="rect">
+            <a:avLst/>
+          </a:prstGeom>
+          <a:noFill/>
+        </p:spPr>
+        <p:txBody>
+          <a:bodyPr wrap="square">
+            <a:spAutoFit/>
+          </a:bodyPr>
+          <a:lstStyle/>
+          <a:p>
             <a:pPr>
               <a:spcBef>
+                <a:spcPts val="400"/>
+              </a:spcBef>
+            </a:pPr>
+            <a:r>
+              <a:t/>
+            </a:r>
+          </a:p>
+          <a:p>
+            <a:pPr>
+              <a:spcBef>
                 <a:spcPts val="800"/>
               </a:spcBef>
             </a:pPr>
@@ -5689,7 +7962,17 @@
           <a:p>
             <a:pPr>
               <a:spcBef>
-                <a:spcPts val="200"/>
+                <a:spcPts val="400"/>
+              </a:spcBef>
+            </a:pPr>
+            <a:r>
+              <a:t/>
+            </a:r>
+          </a:p>
+          <a:p>
+            <a:pPr>
+              <a:spcBef>
+                <a:spcPts val="300"/>
               </a:spcBef>
             </a:pPr>
             <a:r>
@@ -5720,7 +8003,7 @@
           <a:p>
             <a:pPr>
               <a:spcBef>
-                <a:spcPts val="200"/>
+                <a:spcPts val="300"/>
               </a:spcBef>
             </a:pPr>
             <a:r>
@@ -5751,7 +8034,7 @@
           <a:p>
             <a:pPr>
               <a:spcBef>
-                <a:spcPts val="200"/>
+                <a:spcPts val="300"/>
               </a:spcBef>
             </a:pPr>
             <a:r>
@@ -5782,7 +8065,7 @@
           <a:p>
             <a:pPr>
               <a:spcBef>
-                <a:spcPts val="200"/>
+                <a:spcPts val="300"/>
               </a:spcBef>
             </a:pPr>
             <a:r>
@@ -5810,123 +8093,351 @@
               <a:t> — configure </a:t>
             </a:r>
             <a:r>
+              <a:rPr sz="2000">
+                <a:solidFill>
+                  <a:srgbClr val="111111"/>
+                </a:solidFill>
+                <a:latin typeface="Courier New"/>
+              </a:rPr>
+              <a:t>user.name</a:t>
+            </a:r>
+            <a:r>
               <a:rPr sz="2200">
                 <a:solidFill>
                   <a:srgbClr val="111111"/>
                 </a:solidFill>
+              </a:rPr>
+              <a:t> and </a:t>
+            </a:r>
+            <a:r>
+              <a:rPr sz="2000">
+                <a:solidFill>
+                  <a:srgbClr val="111111"/>
+                </a:solidFill>
                 <a:latin typeface="Courier New"/>
               </a:rPr>
-              <a:t>user.name</a:t>
-            </a:r>
+              <a:t>user.email</a:t>
+            </a:r>
+          </a:p>
+          <a:p>
+            <a:pPr>
+              <a:spcBef>
+                <a:spcPts val="300"/>
+              </a:spcBef>
+            </a:pPr>
             <a:r>
               <a:rPr sz="2200">
                 <a:solidFill>
                   <a:srgbClr val="111111"/>
                 </a:solidFill>
               </a:rPr>
-              <a:t> and </a:t>
+              <a:t>5. </a:t>
+            </a:r>
+            <a:r>
+              <a:rPr b="1" sz="2200">
+                <a:solidFill>
+                  <a:srgbClr val="111111"/>
+                </a:solidFill>
+              </a:rPr>
+              <a:t>Install IDE</a:t>
             </a:r>
             <a:r>
               <a:rPr sz="2200">
                 <a:solidFill>
                   <a:srgbClr val="111111"/>
                 </a:solidFill>
+              </a:rPr>
+              <a:t> — open project, let Gradle sync finish</a:t>
+            </a:r>
+          </a:p>
+          <a:p>
+            <a:pPr>
+              <a:spcBef>
+                <a:spcPts val="400"/>
+              </a:spcBef>
+            </a:pPr>
+            <a:r>
+              <a:t/>
+            </a:r>
+          </a:p>
+          <a:p>
+            <a:pPr>
+              <a:spcBef>
+                <a:spcPts val="1000"/>
+              </a:spcBef>
+            </a:pPr>
+            <a:r>
+              <a:t/>
+            </a:r>
+          </a:p>
+          <a:p>
+            <a:pPr>
+              <a:spcBef>
+                <a:spcPts val="400"/>
+              </a:spcBef>
+            </a:pPr>
+            <a:r>
+              <a:t/>
+            </a:r>
+          </a:p>
+        </p:txBody>
+      </p:sp>
+      <p:sp>
+        <p:nvSpPr>
+          <p:cNvPr id="5" name="Rectangle 4"/>
+          <p:cNvSpPr/>
+          <p:nvPr/>
+        </p:nvSpPr>
+        <p:spPr>
+          <a:xfrm>
+            <a:off x="548640" y="3885880"/>
+            <a:ext cx="73152" cy="502880"/>
+          </a:xfrm>
+          <a:prstGeom prst="rect">
+            <a:avLst/>
+          </a:prstGeom>
+          <a:solidFill>
+            <a:srgbClr val="0F3460"/>
+          </a:solidFill>
+          <a:ln>
+            <a:noFill/>
+          </a:ln>
+        </p:spPr>
+        <p:style>
+          <a:lnRef idx="1">
+            <a:schemeClr val="accent1"/>
+          </a:lnRef>
+          <a:fillRef idx="3">
+            <a:schemeClr val="accent1"/>
+          </a:fillRef>
+          <a:effectRef idx="2">
+            <a:schemeClr val="accent1"/>
+          </a:effectRef>
+          <a:fontRef idx="minor">
+            <a:schemeClr val="lt1"/>
+          </a:fontRef>
+        </p:style>
+        <p:txBody>
+          <a:bodyPr rtlCol="0" anchor="ctr"/>
+          <a:lstStyle/>
+          <a:p>
+            <a:pPr algn="ctr"/>
+          </a:p>
+        </p:txBody>
+      </p:sp>
+      <p:sp>
+        <p:nvSpPr>
+          <p:cNvPr id="6" name="Rectangle 5"/>
+          <p:cNvSpPr/>
+          <p:nvPr/>
+        </p:nvSpPr>
+        <p:spPr>
+          <a:xfrm>
+            <a:off x="621792" y="3885880"/>
+            <a:ext cx="11018520" cy="502880"/>
+          </a:xfrm>
+          <a:prstGeom prst="rect">
+            <a:avLst/>
+          </a:prstGeom>
+          <a:solidFill>
+            <a:srgbClr val="E8F0FE"/>
+          </a:solidFill>
+          <a:ln>
+            <a:noFill/>
+          </a:ln>
+        </p:spPr>
+        <p:style>
+          <a:lnRef idx="1">
+            <a:schemeClr val="accent1"/>
+          </a:lnRef>
+          <a:fillRef idx="3">
+            <a:schemeClr val="accent1"/>
+          </a:fillRef>
+          <a:effectRef idx="2">
+            <a:schemeClr val="accent1"/>
+          </a:effectRef>
+          <a:fontRef idx="minor">
+            <a:schemeClr val="lt1"/>
+          </a:fontRef>
+        </p:style>
+        <p:txBody>
+          <a:bodyPr rtlCol="0" anchor="ctr"/>
+          <a:lstStyle/>
+          <a:p>
+            <a:pPr algn="ctr"/>
+          </a:p>
+        </p:txBody>
+      </p:sp>
+      <p:sp>
+        <p:nvSpPr>
+          <p:cNvPr id="7" name="TextBox 6"/>
+          <p:cNvSpPr txBox="1"/>
+          <p:nvPr/>
+        </p:nvSpPr>
+        <p:spPr>
+          <a:xfrm>
+            <a:off x="777240" y="3977320"/>
+            <a:ext cx="10771632" cy="411440"/>
+          </a:xfrm>
+          <a:prstGeom prst="rect">
+            <a:avLst/>
+          </a:prstGeom>
+          <a:noFill/>
+        </p:spPr>
+        <p:txBody>
+          <a:bodyPr wrap="square">
+            <a:spAutoFit/>
+          </a:bodyPr>
+          <a:lstStyle/>
+          <a:p>
+            <a:r>
+              <a:rPr b="1" sz="2000" i="1">
+                <a:solidFill>
+                  <a:srgbClr val="16213E"/>
+                </a:solidFill>
+              </a:rPr>
+              <a:t>Common pitfall:</a:t>
+            </a:r>
+            <a:r>
+              <a:rPr sz="2000" i="1">
+                <a:solidFill>
+                  <a:srgbClr val="16213E"/>
+                </a:solidFill>
+              </a:rPr>
+              <a:t> Docker Desktop requires WSL2 on Windows.</a:t>
+            </a:r>
+          </a:p>
+        </p:txBody>
+      </p:sp>
+      <p:sp>
+        <p:nvSpPr>
+          <p:cNvPr id="8" name="Rectangle 7"/>
+          <p:cNvSpPr/>
+          <p:nvPr/>
+        </p:nvSpPr>
+        <p:spPr>
+          <a:xfrm>
+            <a:off x="548640" y="4480200"/>
+            <a:ext cx="73152" cy="502880"/>
+          </a:xfrm>
+          <a:prstGeom prst="rect">
+            <a:avLst/>
+          </a:prstGeom>
+          <a:solidFill>
+            <a:srgbClr val="0F3460"/>
+          </a:solidFill>
+          <a:ln>
+            <a:noFill/>
+          </a:ln>
+        </p:spPr>
+        <p:style>
+          <a:lnRef idx="1">
+            <a:schemeClr val="accent1"/>
+          </a:lnRef>
+          <a:fillRef idx="3">
+            <a:schemeClr val="accent1"/>
+          </a:fillRef>
+          <a:effectRef idx="2">
+            <a:schemeClr val="accent1"/>
+          </a:effectRef>
+          <a:fontRef idx="minor">
+            <a:schemeClr val="lt1"/>
+          </a:fontRef>
+        </p:style>
+        <p:txBody>
+          <a:bodyPr rtlCol="0" anchor="ctr"/>
+          <a:lstStyle/>
+          <a:p>
+            <a:pPr algn="ctr"/>
+          </a:p>
+        </p:txBody>
+      </p:sp>
+      <p:sp>
+        <p:nvSpPr>
+          <p:cNvPr id="9" name="Rectangle 8"/>
+          <p:cNvSpPr/>
+          <p:nvPr/>
+        </p:nvSpPr>
+        <p:spPr>
+          <a:xfrm>
+            <a:off x="621792" y="4480200"/>
+            <a:ext cx="11018520" cy="502880"/>
+          </a:xfrm>
+          <a:prstGeom prst="rect">
+            <a:avLst/>
+          </a:prstGeom>
+          <a:solidFill>
+            <a:srgbClr val="E8F0FE"/>
+          </a:solidFill>
+          <a:ln>
+            <a:noFill/>
+          </a:ln>
+        </p:spPr>
+        <p:style>
+          <a:lnRef idx="1">
+            <a:schemeClr val="accent1"/>
+          </a:lnRef>
+          <a:fillRef idx="3">
+            <a:schemeClr val="accent1"/>
+          </a:fillRef>
+          <a:effectRef idx="2">
+            <a:schemeClr val="accent1"/>
+          </a:effectRef>
+          <a:fontRef idx="minor">
+            <a:schemeClr val="lt1"/>
+          </a:fontRef>
+        </p:style>
+        <p:txBody>
+          <a:bodyPr rtlCol="0" anchor="ctr"/>
+          <a:lstStyle/>
+          <a:p>
+            <a:pPr algn="ctr"/>
+          </a:p>
+        </p:txBody>
+      </p:sp>
+      <p:sp>
+        <p:nvSpPr>
+          <p:cNvPr id="10" name="TextBox 9"/>
+          <p:cNvSpPr txBox="1"/>
+          <p:nvPr/>
+        </p:nvSpPr>
+        <p:spPr>
+          <a:xfrm>
+            <a:off x="777240" y="4571640"/>
+            <a:ext cx="10771632" cy="411440"/>
+          </a:xfrm>
+          <a:prstGeom prst="rect">
+            <a:avLst/>
+          </a:prstGeom>
+          <a:noFill/>
+        </p:spPr>
+        <p:txBody>
+          <a:bodyPr wrap="square">
+            <a:spAutoFit/>
+          </a:bodyPr>
+          <a:lstStyle/>
+          <a:p>
+            <a:r>
+              <a:rPr sz="2000" i="1">
+                <a:solidFill>
+                  <a:srgbClr val="16213E"/>
+                </a:solidFill>
+              </a:rPr>
+              <a:t>Enable it via </a:t>
+            </a:r>
+            <a:r>
+              <a:rPr sz="2000" i="1">
+                <a:solidFill>
+                  <a:srgbClr val="16213E"/>
+                </a:solidFill>
                 <a:latin typeface="Courier New"/>
               </a:rPr>
-              <a:t>user.email</a:t>
-            </a:r>
-          </a:p>
-          <a:p>
-            <a:pPr>
-              <a:spcBef>
-                <a:spcPts val="200"/>
-              </a:spcBef>
-            </a:pPr>
-            <a:r>
-              <a:rPr sz="2200">
-                <a:solidFill>
-                  <a:srgbClr val="111111"/>
-                </a:solidFill>
-              </a:rPr>
-              <a:t>5. </a:t>
-            </a:r>
-            <a:r>
-              <a:rPr b="1" sz="2200">
-                <a:solidFill>
-                  <a:srgbClr val="111111"/>
-                </a:solidFill>
-              </a:rPr>
-              <a:t>Install IDE</a:t>
-            </a:r>
-            <a:r>
-              <a:rPr sz="2200">
-                <a:solidFill>
-                  <a:srgbClr val="111111"/>
-                </a:solidFill>
-              </a:rPr>
-              <a:t> — open project, let Gradle sync finish</a:t>
-            </a:r>
-          </a:p>
-          <a:p>
-            <a:pPr>
-              <a:spcBef>
-                <a:spcPts val="800"/>
-              </a:spcBef>
-            </a:pPr>
-            <a:r>
-              <a:t/>
-            </a:r>
-          </a:p>
-          <a:p>
-            <a:pPr>
-              <a:spcBef>
-                <a:spcPts val="400"/>
-              </a:spcBef>
-            </a:pPr>
-            <a:r>
-              <a:rPr b="1" sz="2000" i="1">
-                <a:solidFill>
-                  <a:srgbClr val="555555"/>
-                </a:solidFill>
-              </a:rPr>
-              <a:t>Common pitfall:</a:t>
+              <a:t>wsl --install</a:t>
             </a:r>
             <a:r>
               <a:rPr sz="2000" i="1">
                 <a:solidFill>
-                  <a:srgbClr val="555555"/>
-                </a:solidFill>
-              </a:rPr>
-              <a:t> Docker Desktop requires WSL2 on Windows.</a:t>
-            </a:r>
-          </a:p>
-          <a:p>
-            <a:pPr>
-              <a:spcBef>
-                <a:spcPts val="400"/>
-              </a:spcBef>
-            </a:pPr>
-            <a:r>
-              <a:rPr sz="2000" i="1">
-                <a:solidFill>
-                  <a:srgbClr val="555555"/>
-                </a:solidFill>
-              </a:rPr>
-              <a:t>Enable it via </a:t>
-            </a:r>
-            <a:r>
-              <a:rPr sz="2000" i="1">
-                <a:solidFill>
-                  <a:srgbClr val="555555"/>
-                </a:solidFill>
-                <a:latin typeface="Courier New"/>
-              </a:rPr>
-              <a:t>wsl --install</a:t>
-            </a:r>
-            <a:r>
-              <a:rPr sz="2000" i="1">
-                <a:solidFill>
-                  <a:srgbClr val="555555"/>
+                  <a:srgbClr val="16213E"/>
                 </a:solidFill>
               </a:rPr>
               <a:t> before installing Docker Desktop.</a:t>
